--- a/docs/pptx/entire/ritu-entire-linsubhr-ratio-hosp7.pptx
+++ b/docs/pptx/entire/ritu-entire-linsubhr-ratio-hosp7.pptx
@@ -2960,578 +2960,578 @@
           <p:spPr>
             <a:xfrm>
               <a:off x="1172049" y="2073503"/>
-              <a:ext cx="7090630" cy="3372621"/>
+              <a:ext cx="7090630" cy="3373269"/>
             </a:xfrm>
             <a:custGeom>
               <a:avLst/>
               <a:pathLst>
-                <a:path w="7090630" h="3372621">
+                <a:path w="7090630" h="3373269">
                   <a:moveTo>
-                    <a:pt x="792835" y="0"/>
+                    <a:pt x="800559" y="0"/>
                   </a:moveTo>
                   <a:lnTo>
-                    <a:pt x="859470" y="124867"/>
-                  </a:lnTo>
-                  <a:lnTo>
-                    <a:pt x="931092" y="253925"/>
-                  </a:lnTo>
-                  <a:lnTo>
-                    <a:pt x="1002715" y="378024"/>
-                  </a:lnTo>
-                  <a:lnTo>
-                    <a:pt x="1074337" y="497355"/>
-                  </a:lnTo>
-                  <a:lnTo>
-                    <a:pt x="1145960" y="612100"/>
-                  </a:lnTo>
-                  <a:lnTo>
-                    <a:pt x="1217582" y="722437"/>
-                  </a:lnTo>
-                  <a:lnTo>
-                    <a:pt x="1289205" y="828535"/>
-                  </a:lnTo>
-                  <a:lnTo>
-                    <a:pt x="1360827" y="930555"/>
-                  </a:lnTo>
-                  <a:lnTo>
-                    <a:pt x="1432450" y="1028656"/>
-                  </a:lnTo>
-                  <a:lnTo>
-                    <a:pt x="1504073" y="1122988"/>
-                  </a:lnTo>
-                  <a:lnTo>
-                    <a:pt x="1575695" y="1213695"/>
-                  </a:lnTo>
-                  <a:lnTo>
-                    <a:pt x="1647318" y="1300917"/>
-                  </a:lnTo>
-                  <a:lnTo>
-                    <a:pt x="1718940" y="1384787"/>
-                  </a:lnTo>
-                  <a:lnTo>
-                    <a:pt x="1790563" y="1465435"/>
-                  </a:lnTo>
-                  <a:lnTo>
-                    <a:pt x="1862185" y="1542985"/>
-                  </a:lnTo>
-                  <a:lnTo>
-                    <a:pt x="1933808" y="1617554"/>
-                  </a:lnTo>
-                  <a:lnTo>
-                    <a:pt x="2005430" y="1689259"/>
-                  </a:lnTo>
-                  <a:lnTo>
-                    <a:pt x="2077053" y="1758208"/>
-                  </a:lnTo>
-                  <a:lnTo>
-                    <a:pt x="2148675" y="1824508"/>
-                  </a:lnTo>
-                  <a:lnTo>
-                    <a:pt x="2220298" y="1888261"/>
-                  </a:lnTo>
-                  <a:lnTo>
-                    <a:pt x="2291920" y="1949564"/>
-                  </a:lnTo>
-                  <a:lnTo>
-                    <a:pt x="2363543" y="2008512"/>
-                  </a:lnTo>
-                  <a:lnTo>
-                    <a:pt x="2435165" y="2065194"/>
-                  </a:lnTo>
-                  <a:lnTo>
-                    <a:pt x="2506788" y="2119699"/>
-                  </a:lnTo>
-                  <a:lnTo>
-                    <a:pt x="2578410" y="2172110"/>
-                  </a:lnTo>
-                  <a:lnTo>
-                    <a:pt x="2650033" y="2222507"/>
-                  </a:lnTo>
-                  <a:lnTo>
-                    <a:pt x="2721655" y="2270967"/>
-                  </a:lnTo>
-                  <a:lnTo>
-                    <a:pt x="2793278" y="2317565"/>
-                  </a:lnTo>
-                  <a:lnTo>
-                    <a:pt x="2864901" y="2362373"/>
-                  </a:lnTo>
-                  <a:lnTo>
-                    <a:pt x="2936523" y="2405460"/>
-                  </a:lnTo>
-                  <a:lnTo>
-                    <a:pt x="3008146" y="2446891"/>
-                  </a:lnTo>
-                  <a:lnTo>
-                    <a:pt x="3079768" y="2486730"/>
-                  </a:lnTo>
-                  <a:lnTo>
-                    <a:pt x="3151391" y="2525038"/>
-                  </a:lnTo>
-                  <a:lnTo>
-                    <a:pt x="3223013" y="2561874"/>
-                  </a:lnTo>
-                  <a:lnTo>
-                    <a:pt x="3294636" y="2597295"/>
-                  </a:lnTo>
-                  <a:lnTo>
-                    <a:pt x="3366258" y="2631355"/>
-                  </a:lnTo>
-                  <a:lnTo>
-                    <a:pt x="3437881" y="2658163"/>
-                  </a:lnTo>
-                  <a:lnTo>
-                    <a:pt x="3509503" y="2670797"/>
-                  </a:lnTo>
-                  <a:lnTo>
-                    <a:pt x="3581126" y="2683237"/>
-                  </a:lnTo>
-                  <a:lnTo>
-                    <a:pt x="3652748" y="2695486"/>
-                  </a:lnTo>
-                  <a:lnTo>
-                    <a:pt x="3724371" y="2707549"/>
-                  </a:lnTo>
-                  <a:lnTo>
-                    <a:pt x="3795993" y="2719426"/>
-                  </a:lnTo>
-                  <a:lnTo>
-                    <a:pt x="3867616" y="2731122"/>
-                  </a:lnTo>
-                  <a:lnTo>
-                    <a:pt x="3939238" y="2742639"/>
-                  </a:lnTo>
-                  <a:lnTo>
-                    <a:pt x="4010861" y="2753980"/>
-                  </a:lnTo>
-                  <a:lnTo>
-                    <a:pt x="4082483" y="2765147"/>
-                  </a:lnTo>
-                  <a:lnTo>
-                    <a:pt x="4154106" y="2776143"/>
-                  </a:lnTo>
-                  <a:lnTo>
-                    <a:pt x="4225729" y="2786971"/>
-                  </a:lnTo>
-                  <a:lnTo>
-                    <a:pt x="4297351" y="2797634"/>
-                  </a:lnTo>
-                  <a:lnTo>
-                    <a:pt x="4368974" y="2808133"/>
-                  </a:lnTo>
-                  <a:lnTo>
-                    <a:pt x="4440596" y="2818471"/>
-                  </a:lnTo>
-                  <a:lnTo>
-                    <a:pt x="4512219" y="2828651"/>
-                  </a:lnTo>
-                  <a:lnTo>
-                    <a:pt x="4583841" y="2838676"/>
-                  </a:lnTo>
-                  <a:lnTo>
-                    <a:pt x="4655464" y="2848547"/>
-                  </a:lnTo>
-                  <a:lnTo>
-                    <a:pt x="4727086" y="2858267"/>
-                  </a:lnTo>
-                  <a:lnTo>
-                    <a:pt x="4798709" y="2867838"/>
-                  </a:lnTo>
-                  <a:lnTo>
-                    <a:pt x="4870331" y="2877263"/>
-                  </a:lnTo>
-                  <a:lnTo>
-                    <a:pt x="4941954" y="2886544"/>
-                  </a:lnTo>
-                  <a:lnTo>
-                    <a:pt x="5013576" y="2895683"/>
-                  </a:lnTo>
-                  <a:lnTo>
-                    <a:pt x="5085199" y="2904681"/>
-                  </a:lnTo>
-                  <a:lnTo>
-                    <a:pt x="5156821" y="2913542"/>
-                  </a:lnTo>
-                  <a:lnTo>
-                    <a:pt x="5228444" y="2922268"/>
-                  </a:lnTo>
-                  <a:lnTo>
-                    <a:pt x="5300066" y="2930860"/>
-                  </a:lnTo>
-                  <a:lnTo>
-                    <a:pt x="5371689" y="2939320"/>
-                  </a:lnTo>
-                  <a:lnTo>
-                    <a:pt x="5443311" y="2947651"/>
-                  </a:lnTo>
-                  <a:lnTo>
-                    <a:pt x="5514934" y="2955855"/>
-                  </a:lnTo>
-                  <a:lnTo>
-                    <a:pt x="5586557" y="2963933"/>
-                  </a:lnTo>
-                  <a:lnTo>
-                    <a:pt x="5658179" y="2971887"/>
-                  </a:lnTo>
-                  <a:lnTo>
-                    <a:pt x="5729802" y="2979720"/>
-                  </a:lnTo>
-                  <a:lnTo>
-                    <a:pt x="5801424" y="2987433"/>
-                  </a:lnTo>
-                  <a:lnTo>
-                    <a:pt x="5873047" y="2995027"/>
-                  </a:lnTo>
-                  <a:lnTo>
-                    <a:pt x="5944669" y="3002506"/>
-                  </a:lnTo>
-                  <a:lnTo>
-                    <a:pt x="6016292" y="3009870"/>
-                  </a:lnTo>
-                  <a:lnTo>
-                    <a:pt x="6087914" y="3017122"/>
-                  </a:lnTo>
-                  <a:lnTo>
-                    <a:pt x="6159537" y="3024262"/>
-                  </a:lnTo>
-                  <a:lnTo>
-                    <a:pt x="6231159" y="3031293"/>
-                  </a:lnTo>
-                  <a:lnTo>
-                    <a:pt x="6302782" y="3038217"/>
-                  </a:lnTo>
-                  <a:lnTo>
-                    <a:pt x="6374404" y="3045035"/>
-                  </a:lnTo>
-                  <a:lnTo>
-                    <a:pt x="6446027" y="3051748"/>
-                  </a:lnTo>
-                  <a:lnTo>
-                    <a:pt x="6517649" y="3058358"/>
-                  </a:lnTo>
-                  <a:lnTo>
-                    <a:pt x="6589272" y="3064868"/>
-                  </a:lnTo>
-                  <a:lnTo>
-                    <a:pt x="6660894" y="3071278"/>
-                  </a:lnTo>
-                  <a:lnTo>
-                    <a:pt x="6732517" y="3077589"/>
-                  </a:lnTo>
-                  <a:lnTo>
-                    <a:pt x="6804139" y="3083805"/>
-                  </a:lnTo>
-                  <a:lnTo>
-                    <a:pt x="6875762" y="3089925"/>
-                  </a:lnTo>
-                  <a:lnTo>
-                    <a:pt x="6947385" y="3095951"/>
-                  </a:lnTo>
-                  <a:lnTo>
-                    <a:pt x="7019007" y="3101885"/>
-                  </a:lnTo>
-                  <a:lnTo>
-                    <a:pt x="7090630" y="3107729"/>
-                  </a:lnTo>
-                  <a:lnTo>
-                    <a:pt x="7090630" y="3372621"/>
-                  </a:lnTo>
-                  <a:lnTo>
-                    <a:pt x="7019007" y="3368181"/>
-                  </a:lnTo>
-                  <a:lnTo>
-                    <a:pt x="6947385" y="3363563"/>
-                  </a:lnTo>
-                  <a:lnTo>
-                    <a:pt x="6875762" y="3358760"/>
-                  </a:lnTo>
-                  <a:lnTo>
-                    <a:pt x="6804139" y="3353766"/>
-                  </a:lnTo>
-                  <a:lnTo>
-                    <a:pt x="6732517" y="3348572"/>
-                  </a:lnTo>
-                  <a:lnTo>
-                    <a:pt x="6660894" y="3343171"/>
-                  </a:lnTo>
-                  <a:lnTo>
-                    <a:pt x="6589272" y="3337554"/>
-                  </a:lnTo>
-                  <a:lnTo>
-                    <a:pt x="6517649" y="3331712"/>
-                  </a:lnTo>
-                  <a:lnTo>
-                    <a:pt x="6446027" y="3325637"/>
-                  </a:lnTo>
-                  <a:lnTo>
-                    <a:pt x="6374404" y="3319320"/>
-                  </a:lnTo>
-                  <a:lnTo>
-                    <a:pt x="6302782" y="3312749"/>
-                  </a:lnTo>
-                  <a:lnTo>
-                    <a:pt x="6231159" y="3305917"/>
-                  </a:lnTo>
-                  <a:lnTo>
-                    <a:pt x="6159537" y="3298811"/>
-                  </a:lnTo>
-                  <a:lnTo>
-                    <a:pt x="6087914" y="3291421"/>
-                  </a:lnTo>
-                  <a:lnTo>
-                    <a:pt x="6016292" y="3283736"/>
-                  </a:lnTo>
-                  <a:lnTo>
-                    <a:pt x="5944669" y="3275744"/>
-                  </a:lnTo>
-                  <a:lnTo>
-                    <a:pt x="5873047" y="3267433"/>
-                  </a:lnTo>
-                  <a:lnTo>
-                    <a:pt x="5801424" y="3258789"/>
-                  </a:lnTo>
-                  <a:lnTo>
-                    <a:pt x="5729802" y="3249801"/>
-                  </a:lnTo>
-                  <a:lnTo>
-                    <a:pt x="5658179" y="3240453"/>
-                  </a:lnTo>
-                  <a:lnTo>
-                    <a:pt x="5586557" y="3230731"/>
-                  </a:lnTo>
-                  <a:lnTo>
-                    <a:pt x="5514934" y="3220621"/>
-                  </a:lnTo>
-                  <a:lnTo>
-                    <a:pt x="5443311" y="3210107"/>
-                  </a:lnTo>
-                  <a:lnTo>
-                    <a:pt x="5371689" y="3199173"/>
-                  </a:lnTo>
-                  <a:lnTo>
-                    <a:pt x="5300066" y="3187802"/>
-                  </a:lnTo>
-                  <a:lnTo>
-                    <a:pt x="5228444" y="3175976"/>
-                  </a:lnTo>
-                  <a:lnTo>
-                    <a:pt x="5156821" y="3163678"/>
-                  </a:lnTo>
-                  <a:lnTo>
-                    <a:pt x="5085199" y="3150889"/>
-                  </a:lnTo>
-                  <a:lnTo>
-                    <a:pt x="5013576" y="3137589"/>
-                  </a:lnTo>
-                  <a:lnTo>
-                    <a:pt x="4941954" y="3123757"/>
-                  </a:lnTo>
-                  <a:lnTo>
-                    <a:pt x="4870331" y="3109372"/>
-                  </a:lnTo>
-                  <a:lnTo>
-                    <a:pt x="4798709" y="3094413"/>
-                  </a:lnTo>
-                  <a:lnTo>
-                    <a:pt x="4727086" y="3078856"/>
-                  </a:lnTo>
-                  <a:lnTo>
-                    <a:pt x="4655464" y="3062677"/>
-                  </a:lnTo>
-                  <a:lnTo>
-                    <a:pt x="4583841" y="3045852"/>
-                  </a:lnTo>
-                  <a:lnTo>
-                    <a:pt x="4512219" y="3028355"/>
-                  </a:lnTo>
-                  <a:lnTo>
-                    <a:pt x="4440596" y="3010158"/>
-                  </a:lnTo>
-                  <a:lnTo>
-                    <a:pt x="4368974" y="2991234"/>
-                  </a:lnTo>
-                  <a:lnTo>
-                    <a:pt x="4297351" y="2971555"/>
-                  </a:lnTo>
-                  <a:lnTo>
-                    <a:pt x="4225729" y="2951088"/>
-                  </a:lnTo>
-                  <a:lnTo>
-                    <a:pt x="4154106" y="2929804"/>
-                  </a:lnTo>
-                  <a:lnTo>
-                    <a:pt x="4082483" y="2907670"/>
-                  </a:lnTo>
-                  <a:lnTo>
-                    <a:pt x="4010861" y="2884651"/>
-                  </a:lnTo>
-                  <a:lnTo>
-                    <a:pt x="3939238" y="2860712"/>
-                  </a:lnTo>
-                  <a:lnTo>
-                    <a:pt x="3867616" y="2835817"/>
-                  </a:lnTo>
-                  <a:lnTo>
-                    <a:pt x="3795993" y="2809927"/>
-                  </a:lnTo>
-                  <a:lnTo>
-                    <a:pt x="3724371" y="2783002"/>
-                  </a:lnTo>
-                  <a:lnTo>
-                    <a:pt x="3652748" y="2755002"/>
-                  </a:lnTo>
-                  <a:lnTo>
-                    <a:pt x="3581126" y="2725882"/>
-                  </a:lnTo>
-                  <a:lnTo>
-                    <a:pt x="3509503" y="2695599"/>
-                  </a:lnTo>
-                  <a:lnTo>
-                    <a:pt x="3437881" y="2664106"/>
-                  </a:lnTo>
-                  <a:lnTo>
-                    <a:pt x="3366258" y="2645333"/>
-                  </a:lnTo>
-                  <a:lnTo>
-                    <a:pt x="3294636" y="2632304"/>
-                  </a:lnTo>
-                  <a:lnTo>
-                    <a:pt x="3223013" y="2619073"/>
-                  </a:lnTo>
-                  <a:lnTo>
-                    <a:pt x="3151391" y="2605636"/>
-                  </a:lnTo>
-                  <a:lnTo>
-                    <a:pt x="3079768" y="2591990"/>
-                  </a:lnTo>
-                  <a:lnTo>
-                    <a:pt x="3008146" y="2578132"/>
-                  </a:lnTo>
-                  <a:lnTo>
-                    <a:pt x="2936523" y="2564058"/>
-                  </a:lnTo>
-                  <a:lnTo>
-                    <a:pt x="2864901" y="2549766"/>
-                  </a:lnTo>
-                  <a:lnTo>
-                    <a:pt x="2793278" y="2535252"/>
-                  </a:lnTo>
-                  <a:lnTo>
-                    <a:pt x="2721655" y="2520512"/>
-                  </a:lnTo>
-                  <a:lnTo>
-                    <a:pt x="2650033" y="2505543"/>
-                  </a:lnTo>
-                  <a:lnTo>
-                    <a:pt x="2578410" y="2490342"/>
-                  </a:lnTo>
-                  <a:lnTo>
-                    <a:pt x="2506788" y="2474904"/>
-                  </a:lnTo>
-                  <a:lnTo>
-                    <a:pt x="2435165" y="2459227"/>
-                  </a:lnTo>
-                  <a:lnTo>
-                    <a:pt x="2363543" y="2443305"/>
-                  </a:lnTo>
-                  <a:lnTo>
-                    <a:pt x="2291920" y="2427137"/>
-                  </a:lnTo>
-                  <a:lnTo>
-                    <a:pt x="2220298" y="2410717"/>
-                  </a:lnTo>
-                  <a:lnTo>
-                    <a:pt x="2148675" y="2394042"/>
-                  </a:lnTo>
-                  <a:lnTo>
-                    <a:pt x="2077053" y="2377108"/>
-                  </a:lnTo>
-                  <a:lnTo>
-                    <a:pt x="2005430" y="2359910"/>
-                  </a:lnTo>
-                  <a:lnTo>
-                    <a:pt x="1933808" y="2342446"/>
-                  </a:lnTo>
-                  <a:lnTo>
-                    <a:pt x="1862185" y="2324710"/>
-                  </a:lnTo>
-                  <a:lnTo>
-                    <a:pt x="1790563" y="2306698"/>
-                  </a:lnTo>
-                  <a:lnTo>
-                    <a:pt x="1718940" y="2288406"/>
-                  </a:lnTo>
-                  <a:lnTo>
-                    <a:pt x="1647318" y="2269831"/>
-                  </a:lnTo>
-                  <a:lnTo>
-                    <a:pt x="1575695" y="2250966"/>
-                  </a:lnTo>
-                  <a:lnTo>
-                    <a:pt x="1504073" y="2231809"/>
-                  </a:lnTo>
-                  <a:lnTo>
-                    <a:pt x="1432450" y="2212353"/>
-                  </a:lnTo>
-                  <a:lnTo>
-                    <a:pt x="1360827" y="2192596"/>
-                  </a:lnTo>
-                  <a:lnTo>
-                    <a:pt x="1289205" y="2172531"/>
-                  </a:lnTo>
-                  <a:lnTo>
-                    <a:pt x="1217582" y="2152154"/>
-                  </a:lnTo>
-                  <a:lnTo>
-                    <a:pt x="1145960" y="2131461"/>
-                  </a:lnTo>
-                  <a:lnTo>
-                    <a:pt x="1074337" y="2110446"/>
-                  </a:lnTo>
-                  <a:lnTo>
-                    <a:pt x="1002715" y="2089105"/>
-                  </a:lnTo>
-                  <a:lnTo>
-                    <a:pt x="931092" y="2067432"/>
-                  </a:lnTo>
-                  <a:lnTo>
-                    <a:pt x="859470" y="2045422"/>
-                  </a:lnTo>
-                  <a:lnTo>
-                    <a:pt x="787847" y="2023071"/>
-                  </a:lnTo>
-                  <a:lnTo>
-                    <a:pt x="716225" y="2000371"/>
-                  </a:lnTo>
-                  <a:lnTo>
-                    <a:pt x="644602" y="1977319"/>
-                  </a:lnTo>
-                  <a:lnTo>
-                    <a:pt x="572980" y="1953909"/>
-                  </a:lnTo>
-                  <a:lnTo>
-                    <a:pt x="501357" y="1930135"/>
-                  </a:lnTo>
-                  <a:lnTo>
-                    <a:pt x="429735" y="1905992"/>
-                  </a:lnTo>
-                  <a:lnTo>
-                    <a:pt x="358112" y="1881473"/>
-                  </a:lnTo>
-                  <a:lnTo>
-                    <a:pt x="286490" y="1856574"/>
-                  </a:lnTo>
-                  <a:lnTo>
-                    <a:pt x="214867" y="1831287"/>
-                  </a:lnTo>
-                  <a:lnTo>
-                    <a:pt x="143245" y="1805608"/>
-                  </a:lnTo>
-                  <a:lnTo>
-                    <a:pt x="71622" y="1779529"/>
-                  </a:lnTo>
-                  <a:lnTo>
-                    <a:pt x="0" y="1753045"/>
+                    <a:pt x="859470" y="111172"/>
+                  </a:lnTo>
+                  <a:lnTo>
+                    <a:pt x="931092" y="241126"/>
+                  </a:lnTo>
+                  <a:lnTo>
+                    <a:pt x="1002715" y="366072"/>
+                  </a:lnTo>
+                  <a:lnTo>
+                    <a:pt x="1074337" y="486204"/>
+                  </a:lnTo>
+                  <a:lnTo>
+                    <a:pt x="1145960" y="601706"/>
+                  </a:lnTo>
+                  <a:lnTo>
+                    <a:pt x="1217582" y="712758"/>
+                  </a:lnTo>
+                  <a:lnTo>
+                    <a:pt x="1289205" y="819531"/>
+                  </a:lnTo>
+                  <a:lnTo>
+                    <a:pt x="1360827" y="922190"/>
+                  </a:lnTo>
+                  <a:lnTo>
+                    <a:pt x="1432450" y="1020893"/>
+                  </a:lnTo>
+                  <a:lnTo>
+                    <a:pt x="1504073" y="1115793"/>
+                  </a:lnTo>
+                  <a:lnTo>
+                    <a:pt x="1575695" y="1207036"/>
+                  </a:lnTo>
+                  <a:lnTo>
+                    <a:pt x="1647318" y="1294763"/>
+                  </a:lnTo>
+                  <a:lnTo>
+                    <a:pt x="1718940" y="1379110"/>
+                  </a:lnTo>
+                  <a:lnTo>
+                    <a:pt x="1790563" y="1460207"/>
+                  </a:lnTo>
+                  <a:lnTo>
+                    <a:pt x="1862185" y="1538179"/>
+                  </a:lnTo>
+                  <a:lnTo>
+                    <a:pt x="1933808" y="1613146"/>
+                  </a:lnTo>
+                  <a:lnTo>
+                    <a:pt x="2005430" y="1685225"/>
+                  </a:lnTo>
+                  <a:lnTo>
+                    <a:pt x="2077053" y="1754527"/>
+                  </a:lnTo>
+                  <a:lnTo>
+                    <a:pt x="2148675" y="1821158"/>
+                  </a:lnTo>
+                  <a:lnTo>
+                    <a:pt x="2220298" y="1885221"/>
+                  </a:lnTo>
+                  <a:lnTo>
+                    <a:pt x="2291920" y="1946817"/>
+                  </a:lnTo>
+                  <a:lnTo>
+                    <a:pt x="2363543" y="2006038"/>
+                  </a:lnTo>
+                  <a:lnTo>
+                    <a:pt x="2435165" y="2062978"/>
+                  </a:lnTo>
+                  <a:lnTo>
+                    <a:pt x="2506788" y="2117724"/>
+                  </a:lnTo>
+                  <a:lnTo>
+                    <a:pt x="2578410" y="2170360"/>
+                  </a:lnTo>
+                  <a:lnTo>
+                    <a:pt x="2650033" y="2220968"/>
+                  </a:lnTo>
+                  <a:lnTo>
+                    <a:pt x="2721655" y="2269626"/>
+                  </a:lnTo>
+                  <a:lnTo>
+                    <a:pt x="2793278" y="2316409"/>
+                  </a:lnTo>
+                  <a:lnTo>
+                    <a:pt x="2864901" y="2361389"/>
+                  </a:lnTo>
+                  <a:lnTo>
+                    <a:pt x="2936523" y="2404636"/>
+                  </a:lnTo>
+                  <a:lnTo>
+                    <a:pt x="3008146" y="2446217"/>
+                  </a:lnTo>
+                  <a:lnTo>
+                    <a:pt x="3079768" y="2486196"/>
+                  </a:lnTo>
+                  <a:lnTo>
+                    <a:pt x="3151391" y="2524634"/>
+                  </a:lnTo>
+                  <a:lnTo>
+                    <a:pt x="3223013" y="2561591"/>
+                  </a:lnTo>
+                  <a:lnTo>
+                    <a:pt x="3294636" y="2597124"/>
+                  </a:lnTo>
+                  <a:lnTo>
+                    <a:pt x="3366258" y="2631288"/>
+                  </a:lnTo>
+                  <a:lnTo>
+                    <a:pt x="3437881" y="2658179"/>
+                  </a:lnTo>
+                  <a:lnTo>
+                    <a:pt x="3509503" y="2670863"/>
+                  </a:lnTo>
+                  <a:lnTo>
+                    <a:pt x="3581126" y="2683352"/>
+                  </a:lnTo>
+                  <a:lnTo>
+                    <a:pt x="3652748" y="2695650"/>
+                  </a:lnTo>
+                  <a:lnTo>
+                    <a:pt x="3724371" y="2707758"/>
+                  </a:lnTo>
+                  <a:lnTo>
+                    <a:pt x="3795993" y="2719680"/>
+                  </a:lnTo>
+                  <a:lnTo>
+                    <a:pt x="3867616" y="2731419"/>
+                  </a:lnTo>
+                  <a:lnTo>
+                    <a:pt x="3939238" y="2742978"/>
+                  </a:lnTo>
+                  <a:lnTo>
+                    <a:pt x="4010861" y="2754360"/>
+                  </a:lnTo>
+                  <a:lnTo>
+                    <a:pt x="4082483" y="2765566"/>
+                  </a:lnTo>
+                  <a:lnTo>
+                    <a:pt x="4154106" y="2776600"/>
+                  </a:lnTo>
+                  <a:lnTo>
+                    <a:pt x="4225729" y="2787465"/>
+                  </a:lnTo>
+                  <a:lnTo>
+                    <a:pt x="4297351" y="2798162"/>
+                  </a:lnTo>
+                  <a:lnTo>
+                    <a:pt x="4368974" y="2808696"/>
+                  </a:lnTo>
+                  <a:lnTo>
+                    <a:pt x="4440596" y="2819067"/>
+                  </a:lnTo>
+                  <a:lnTo>
+                    <a:pt x="4512219" y="2829280"/>
+                  </a:lnTo>
+                  <a:lnTo>
+                    <a:pt x="4583841" y="2839335"/>
+                  </a:lnTo>
+                  <a:lnTo>
+                    <a:pt x="4655464" y="2849236"/>
+                  </a:lnTo>
+                  <a:lnTo>
+                    <a:pt x="4727086" y="2858984"/>
+                  </a:lnTo>
+                  <a:lnTo>
+                    <a:pt x="4798709" y="2868583"/>
+                  </a:lnTo>
+                  <a:lnTo>
+                    <a:pt x="4870331" y="2878035"/>
+                  </a:lnTo>
+                  <a:lnTo>
+                    <a:pt x="4941954" y="2887341"/>
+                  </a:lnTo>
+                  <a:lnTo>
+                    <a:pt x="5013576" y="2896504"/>
+                  </a:lnTo>
+                  <a:lnTo>
+                    <a:pt x="5085199" y="2905526"/>
+                  </a:lnTo>
+                  <a:lnTo>
+                    <a:pt x="5156821" y="2914410"/>
+                  </a:lnTo>
+                  <a:lnTo>
+                    <a:pt x="5228444" y="2923158"/>
+                  </a:lnTo>
+                  <a:lnTo>
+                    <a:pt x="5300066" y="2931771"/>
+                  </a:lnTo>
+                  <a:lnTo>
+                    <a:pt x="5371689" y="2940251"/>
+                  </a:lnTo>
+                  <a:lnTo>
+                    <a:pt x="5443311" y="2948601"/>
+                  </a:lnTo>
+                  <a:lnTo>
+                    <a:pt x="5514934" y="2956823"/>
+                  </a:lnTo>
+                  <a:lnTo>
+                    <a:pt x="5586557" y="2964919"/>
+                  </a:lnTo>
+                  <a:lnTo>
+                    <a:pt x="5658179" y="2972890"/>
+                  </a:lnTo>
+                  <a:lnTo>
+                    <a:pt x="5729802" y="2980739"/>
+                  </a:lnTo>
+                  <a:lnTo>
+                    <a:pt x="5801424" y="2988468"/>
+                  </a:lnTo>
+                  <a:lnTo>
+                    <a:pt x="5873047" y="2996077"/>
+                  </a:lnTo>
+                  <a:lnTo>
+                    <a:pt x="5944669" y="3003570"/>
+                  </a:lnTo>
+                  <a:lnTo>
+                    <a:pt x="6016292" y="3010947"/>
+                  </a:lnTo>
+                  <a:lnTo>
+                    <a:pt x="6087914" y="3018211"/>
+                  </a:lnTo>
+                  <a:lnTo>
+                    <a:pt x="6159537" y="3025364"/>
+                  </a:lnTo>
+                  <a:lnTo>
+                    <a:pt x="6231159" y="3032406"/>
+                  </a:lnTo>
+                  <a:lnTo>
+                    <a:pt x="6302782" y="3039341"/>
+                  </a:lnTo>
+                  <a:lnTo>
+                    <a:pt x="6374404" y="3046169"/>
+                  </a:lnTo>
+                  <a:lnTo>
+                    <a:pt x="6446027" y="3052892"/>
+                  </a:lnTo>
+                  <a:lnTo>
+                    <a:pt x="6517649" y="3059511"/>
+                  </a:lnTo>
+                  <a:lnTo>
+                    <a:pt x="6589272" y="3066029"/>
+                  </a:lnTo>
+                  <a:lnTo>
+                    <a:pt x="6660894" y="3072447"/>
+                  </a:lnTo>
+                  <a:lnTo>
+                    <a:pt x="6732517" y="3078766"/>
+                  </a:lnTo>
+                  <a:lnTo>
+                    <a:pt x="6804139" y="3084989"/>
+                  </a:lnTo>
+                  <a:lnTo>
+                    <a:pt x="6875762" y="3091115"/>
+                  </a:lnTo>
+                  <a:lnTo>
+                    <a:pt x="6947385" y="3097148"/>
+                  </a:lnTo>
+                  <a:lnTo>
+                    <a:pt x="7019007" y="3103087"/>
+                  </a:lnTo>
+                  <a:lnTo>
+                    <a:pt x="7090630" y="3108936"/>
+                  </a:lnTo>
+                  <a:lnTo>
+                    <a:pt x="7090630" y="3373269"/>
+                  </a:lnTo>
+                  <a:lnTo>
+                    <a:pt x="7019007" y="3368841"/>
+                  </a:lnTo>
+                  <a:lnTo>
+                    <a:pt x="6947385" y="3364236"/>
+                  </a:lnTo>
+                  <a:lnTo>
+                    <a:pt x="6875762" y="3359447"/>
+                  </a:lnTo>
+                  <a:lnTo>
+                    <a:pt x="6804139" y="3354465"/>
+                  </a:lnTo>
+                  <a:lnTo>
+                    <a:pt x="6732517" y="3349284"/>
+                  </a:lnTo>
+                  <a:lnTo>
+                    <a:pt x="6660894" y="3343895"/>
+                  </a:lnTo>
+                  <a:lnTo>
+                    <a:pt x="6589272" y="3338290"/>
+                  </a:lnTo>
+                  <a:lnTo>
+                    <a:pt x="6517649" y="3332461"/>
+                  </a:lnTo>
+                  <a:lnTo>
+                    <a:pt x="6446027" y="3326398"/>
+                  </a:lnTo>
+                  <a:lnTo>
+                    <a:pt x="6374404" y="3320092"/>
+                  </a:lnTo>
+                  <a:lnTo>
+                    <a:pt x="6302782" y="3313533"/>
+                  </a:lnTo>
+                  <a:lnTo>
+                    <a:pt x="6231159" y="3306712"/>
+                  </a:lnTo>
+                  <a:lnTo>
+                    <a:pt x="6159537" y="3299617"/>
+                  </a:lnTo>
+                  <a:lnTo>
+                    <a:pt x="6087914" y="3292237"/>
+                  </a:lnTo>
+                  <a:lnTo>
+                    <a:pt x="6016292" y="3284562"/>
+                  </a:lnTo>
+                  <a:lnTo>
+                    <a:pt x="5944669" y="3276580"/>
+                  </a:lnTo>
+                  <a:lnTo>
+                    <a:pt x="5873047" y="3268277"/>
+                  </a:lnTo>
+                  <a:lnTo>
+                    <a:pt x="5801424" y="3259642"/>
+                  </a:lnTo>
+                  <a:lnTo>
+                    <a:pt x="5729802" y="3250660"/>
+                  </a:lnTo>
+                  <a:lnTo>
+                    <a:pt x="5658179" y="3241319"/>
+                  </a:lnTo>
+                  <a:lnTo>
+                    <a:pt x="5586557" y="3231603"/>
+                  </a:lnTo>
+                  <a:lnTo>
+                    <a:pt x="5514934" y="3221498"/>
+                  </a:lnTo>
+                  <a:lnTo>
+                    <a:pt x="5443311" y="3210988"/>
+                  </a:lnTo>
+                  <a:lnTo>
+                    <a:pt x="5371689" y="3200057"/>
+                  </a:lnTo>
+                  <a:lnTo>
+                    <a:pt x="5300066" y="3188688"/>
+                  </a:lnTo>
+                  <a:lnTo>
+                    <a:pt x="5228444" y="3176863"/>
+                  </a:lnTo>
+                  <a:lnTo>
+                    <a:pt x="5156821" y="3164564"/>
+                  </a:lnTo>
+                  <a:lnTo>
+                    <a:pt x="5085199" y="3151772"/>
+                  </a:lnTo>
+                  <a:lnTo>
+                    <a:pt x="5013576" y="3138468"/>
+                  </a:lnTo>
+                  <a:lnTo>
+                    <a:pt x="4941954" y="3124630"/>
+                  </a:lnTo>
+                  <a:lnTo>
+                    <a:pt x="4870331" y="3110238"/>
+                  </a:lnTo>
+                  <a:lnTo>
+                    <a:pt x="4798709" y="3095269"/>
+                  </a:lnTo>
+                  <a:lnTo>
+                    <a:pt x="4727086" y="3079700"/>
+                  </a:lnTo>
+                  <a:lnTo>
+                    <a:pt x="4655464" y="3063507"/>
+                  </a:lnTo>
+                  <a:lnTo>
+                    <a:pt x="4583841" y="3046665"/>
+                  </a:lnTo>
+                  <a:lnTo>
+                    <a:pt x="4512219" y="3029148"/>
+                  </a:lnTo>
+                  <a:lnTo>
+                    <a:pt x="4440596" y="3010930"/>
+                  </a:lnTo>
+                  <a:lnTo>
+                    <a:pt x="4368974" y="2991981"/>
+                  </a:lnTo>
+                  <a:lnTo>
+                    <a:pt x="4297351" y="2972272"/>
+                  </a:lnTo>
+                  <a:lnTo>
+                    <a:pt x="4225729" y="2951774"/>
+                  </a:lnTo>
+                  <a:lnTo>
+                    <a:pt x="4154106" y="2930454"/>
+                  </a:lnTo>
+                  <a:lnTo>
+                    <a:pt x="4082483" y="2908280"/>
+                  </a:lnTo>
+                  <a:lnTo>
+                    <a:pt x="4010861" y="2885218"/>
+                  </a:lnTo>
+                  <a:lnTo>
+                    <a:pt x="3939238" y="2861231"/>
+                  </a:lnTo>
+                  <a:lnTo>
+                    <a:pt x="3867616" y="2836282"/>
+                  </a:lnTo>
+                  <a:lnTo>
+                    <a:pt x="3795993" y="2810334"/>
+                  </a:lnTo>
+                  <a:lnTo>
+                    <a:pt x="3724371" y="2783346"/>
+                  </a:lnTo>
+                  <a:lnTo>
+                    <a:pt x="3652748" y="2755276"/>
+                  </a:lnTo>
+                  <a:lnTo>
+                    <a:pt x="3581126" y="2726081"/>
+                  </a:lnTo>
+                  <a:lnTo>
+                    <a:pt x="3509503" y="2695717"/>
+                  </a:lnTo>
+                  <a:lnTo>
+                    <a:pt x="3437881" y="2664135"/>
+                  </a:lnTo>
+                  <a:lnTo>
+                    <a:pt x="3366258" y="2645297"/>
+                  </a:lnTo>
+                  <a:lnTo>
+                    <a:pt x="3294636" y="2632214"/>
+                  </a:lnTo>
+                  <a:lnTo>
+                    <a:pt x="3223013" y="2618927"/>
+                  </a:lnTo>
+                  <a:lnTo>
+                    <a:pt x="3151391" y="2605432"/>
+                  </a:lnTo>
+                  <a:lnTo>
+                    <a:pt x="3079768" y="2591727"/>
+                  </a:lnTo>
+                  <a:lnTo>
+                    <a:pt x="3008146" y="2577808"/>
+                  </a:lnTo>
+                  <a:lnTo>
+                    <a:pt x="2936523" y="2563672"/>
+                  </a:lnTo>
+                  <a:lnTo>
+                    <a:pt x="2864901" y="2549316"/>
+                  </a:lnTo>
+                  <a:lnTo>
+                    <a:pt x="2793278" y="2534735"/>
+                  </a:lnTo>
+                  <a:lnTo>
+                    <a:pt x="2721655" y="2519927"/>
+                  </a:lnTo>
+                  <a:lnTo>
+                    <a:pt x="2650033" y="2504887"/>
+                  </a:lnTo>
+                  <a:lnTo>
+                    <a:pt x="2578410" y="2489613"/>
+                  </a:lnTo>
+                  <a:lnTo>
+                    <a:pt x="2506788" y="2474101"/>
+                  </a:lnTo>
+                  <a:lnTo>
+                    <a:pt x="2435165" y="2458347"/>
+                  </a:lnTo>
+                  <a:lnTo>
+                    <a:pt x="2363543" y="2442347"/>
+                  </a:lnTo>
+                  <a:lnTo>
+                    <a:pt x="2291920" y="2426097"/>
+                  </a:lnTo>
+                  <a:lnTo>
+                    <a:pt x="2220298" y="2409593"/>
+                  </a:lnTo>
+                  <a:lnTo>
+                    <a:pt x="2148675" y="2392833"/>
+                  </a:lnTo>
+                  <a:lnTo>
+                    <a:pt x="2077053" y="2375810"/>
+                  </a:lnTo>
+                  <a:lnTo>
+                    <a:pt x="2005430" y="2358522"/>
+                  </a:lnTo>
+                  <a:lnTo>
+                    <a:pt x="1933808" y="2340964"/>
+                  </a:lnTo>
+                  <a:lnTo>
+                    <a:pt x="1862185" y="2323133"/>
+                  </a:lnTo>
+                  <a:lnTo>
+                    <a:pt x="1790563" y="2305022"/>
+                  </a:lnTo>
+                  <a:lnTo>
+                    <a:pt x="1718940" y="2286630"/>
+                  </a:lnTo>
+                  <a:lnTo>
+                    <a:pt x="1647318" y="2267950"/>
+                  </a:lnTo>
+                  <a:lnTo>
+                    <a:pt x="1575695" y="2248979"/>
+                  </a:lnTo>
+                  <a:lnTo>
+                    <a:pt x="1504073" y="2229712"/>
+                  </a:lnTo>
+                  <a:lnTo>
+                    <a:pt x="1432450" y="2210144"/>
+                  </a:lnTo>
+                  <a:lnTo>
+                    <a:pt x="1360827" y="2190271"/>
+                  </a:lnTo>
+                  <a:lnTo>
+                    <a:pt x="1289205" y="2170088"/>
+                  </a:lnTo>
+                  <a:lnTo>
+                    <a:pt x="1217582" y="2149590"/>
+                  </a:lnTo>
+                  <a:lnTo>
+                    <a:pt x="1145960" y="2128772"/>
+                  </a:lnTo>
+                  <a:lnTo>
+                    <a:pt x="1074337" y="2107629"/>
+                  </a:lnTo>
+                  <a:lnTo>
+                    <a:pt x="1002715" y="2086157"/>
+                  </a:lnTo>
+                  <a:lnTo>
+                    <a:pt x="931092" y="2064349"/>
+                  </a:lnTo>
+                  <a:lnTo>
+                    <a:pt x="859470" y="2042201"/>
+                  </a:lnTo>
+                  <a:lnTo>
+                    <a:pt x="787847" y="2019707"/>
+                  </a:lnTo>
+                  <a:lnTo>
+                    <a:pt x="716225" y="1996863"/>
+                  </a:lnTo>
+                  <a:lnTo>
+                    <a:pt x="644602" y="1973662"/>
+                  </a:lnTo>
+                  <a:lnTo>
+                    <a:pt x="572980" y="1950099"/>
+                  </a:lnTo>
+                  <a:lnTo>
+                    <a:pt x="501357" y="1926168"/>
+                  </a:lnTo>
+                  <a:lnTo>
+                    <a:pt x="429735" y="1901864"/>
+                  </a:lnTo>
+                  <a:lnTo>
+                    <a:pt x="358112" y="1877180"/>
+                  </a:lnTo>
+                  <a:lnTo>
+                    <a:pt x="286490" y="1852112"/>
+                  </a:lnTo>
+                  <a:lnTo>
+                    <a:pt x="214867" y="1826652"/>
+                  </a:lnTo>
+                  <a:lnTo>
+                    <a:pt x="143245" y="1800795"/>
+                  </a:lnTo>
+                  <a:lnTo>
+                    <a:pt x="71622" y="1774534"/>
+                  </a:lnTo>
+                  <a:lnTo>
+                    <a:pt x="0" y="1747864"/>
                   </a:lnTo>
                   <a:close/>
                 </a:path>
@@ -3557,279 +3557,279 @@
           </p:nvSpPr>
           <p:spPr>
             <a:xfrm>
-              <a:off x="1964885" y="2073503"/>
-              <a:ext cx="6297794" cy="3107729"/>
+              <a:off x="1972609" y="2073503"/>
+              <a:ext cx="6290070" cy="3108936"/>
             </a:xfrm>
             <a:custGeom>
               <a:avLst/>
               <a:pathLst>
-                <a:path w="6297794" h="3107729">
+                <a:path w="6290070" h="3108936">
                   <a:moveTo>
                     <a:pt x="0" y="0"/>
                   </a:moveTo>
                   <a:lnTo>
-                    <a:pt x="66634" y="124867"/>
-                  </a:lnTo>
-                  <a:lnTo>
-                    <a:pt x="138257" y="253925"/>
-                  </a:lnTo>
-                  <a:lnTo>
-                    <a:pt x="209879" y="378024"/>
-                  </a:lnTo>
-                  <a:lnTo>
-                    <a:pt x="281502" y="497355"/>
-                  </a:lnTo>
-                  <a:lnTo>
-                    <a:pt x="353124" y="612100"/>
-                  </a:lnTo>
-                  <a:lnTo>
-                    <a:pt x="424747" y="722437"/>
-                  </a:lnTo>
-                  <a:lnTo>
-                    <a:pt x="496369" y="828535"/>
-                  </a:lnTo>
-                  <a:lnTo>
-                    <a:pt x="567992" y="930555"/>
-                  </a:lnTo>
-                  <a:lnTo>
-                    <a:pt x="639614" y="1028656"/>
-                  </a:lnTo>
-                  <a:lnTo>
-                    <a:pt x="711237" y="1122988"/>
-                  </a:lnTo>
-                  <a:lnTo>
-                    <a:pt x="782859" y="1213695"/>
-                  </a:lnTo>
-                  <a:lnTo>
-                    <a:pt x="854482" y="1300917"/>
-                  </a:lnTo>
-                  <a:lnTo>
-                    <a:pt x="926104" y="1384787"/>
-                  </a:lnTo>
-                  <a:lnTo>
-                    <a:pt x="997727" y="1465435"/>
-                  </a:lnTo>
-                  <a:lnTo>
-                    <a:pt x="1069350" y="1542985"/>
-                  </a:lnTo>
-                  <a:lnTo>
-                    <a:pt x="1140972" y="1617554"/>
-                  </a:lnTo>
-                  <a:lnTo>
-                    <a:pt x="1212595" y="1689259"/>
-                  </a:lnTo>
-                  <a:lnTo>
-                    <a:pt x="1284217" y="1758208"/>
-                  </a:lnTo>
-                  <a:lnTo>
-                    <a:pt x="1355840" y="1824508"/>
-                  </a:lnTo>
-                  <a:lnTo>
-                    <a:pt x="1427462" y="1888261"/>
-                  </a:lnTo>
-                  <a:lnTo>
-                    <a:pt x="1499085" y="1949564"/>
-                  </a:lnTo>
-                  <a:lnTo>
-                    <a:pt x="1570707" y="2008512"/>
-                  </a:lnTo>
-                  <a:lnTo>
-                    <a:pt x="1642330" y="2065194"/>
-                  </a:lnTo>
-                  <a:lnTo>
-                    <a:pt x="1713952" y="2119699"/>
-                  </a:lnTo>
-                  <a:lnTo>
-                    <a:pt x="1785575" y="2172110"/>
-                  </a:lnTo>
-                  <a:lnTo>
-                    <a:pt x="1857197" y="2222507"/>
-                  </a:lnTo>
-                  <a:lnTo>
-                    <a:pt x="1928820" y="2270967"/>
-                  </a:lnTo>
-                  <a:lnTo>
-                    <a:pt x="2000442" y="2317565"/>
-                  </a:lnTo>
-                  <a:lnTo>
-                    <a:pt x="2072065" y="2362373"/>
-                  </a:lnTo>
-                  <a:lnTo>
-                    <a:pt x="2143687" y="2405460"/>
-                  </a:lnTo>
-                  <a:lnTo>
-                    <a:pt x="2215310" y="2446891"/>
-                  </a:lnTo>
-                  <a:lnTo>
-                    <a:pt x="2286932" y="2486730"/>
-                  </a:lnTo>
-                  <a:lnTo>
-                    <a:pt x="2358555" y="2525038"/>
-                  </a:lnTo>
-                  <a:lnTo>
-                    <a:pt x="2430178" y="2561874"/>
-                  </a:lnTo>
-                  <a:lnTo>
-                    <a:pt x="2501800" y="2597295"/>
-                  </a:lnTo>
-                  <a:lnTo>
-                    <a:pt x="2573423" y="2631355"/>
-                  </a:lnTo>
-                  <a:lnTo>
-                    <a:pt x="2645045" y="2658163"/>
-                  </a:lnTo>
-                  <a:lnTo>
-                    <a:pt x="2716668" y="2670797"/>
-                  </a:lnTo>
-                  <a:lnTo>
-                    <a:pt x="2788290" y="2683237"/>
-                  </a:lnTo>
-                  <a:lnTo>
-                    <a:pt x="2859913" y="2695486"/>
-                  </a:lnTo>
-                  <a:lnTo>
-                    <a:pt x="2931535" y="2707549"/>
-                  </a:lnTo>
-                  <a:lnTo>
-                    <a:pt x="3003158" y="2719426"/>
-                  </a:lnTo>
-                  <a:lnTo>
-                    <a:pt x="3074780" y="2731122"/>
-                  </a:lnTo>
-                  <a:lnTo>
-                    <a:pt x="3146403" y="2742639"/>
-                  </a:lnTo>
-                  <a:lnTo>
-                    <a:pt x="3218025" y="2753980"/>
-                  </a:lnTo>
-                  <a:lnTo>
-                    <a:pt x="3289648" y="2765147"/>
-                  </a:lnTo>
-                  <a:lnTo>
-                    <a:pt x="3361270" y="2776143"/>
-                  </a:lnTo>
-                  <a:lnTo>
-                    <a:pt x="3432893" y="2786971"/>
-                  </a:lnTo>
-                  <a:lnTo>
-                    <a:pt x="3504515" y="2797634"/>
-                  </a:lnTo>
-                  <a:lnTo>
-                    <a:pt x="3576138" y="2808133"/>
-                  </a:lnTo>
-                  <a:lnTo>
-                    <a:pt x="3647760" y="2818471"/>
-                  </a:lnTo>
-                  <a:lnTo>
-                    <a:pt x="3719383" y="2828651"/>
-                  </a:lnTo>
-                  <a:lnTo>
-                    <a:pt x="3791006" y="2838676"/>
-                  </a:lnTo>
-                  <a:lnTo>
-                    <a:pt x="3862628" y="2848547"/>
-                  </a:lnTo>
-                  <a:lnTo>
-                    <a:pt x="3934251" y="2858267"/>
-                  </a:lnTo>
-                  <a:lnTo>
-                    <a:pt x="4005873" y="2867838"/>
-                  </a:lnTo>
-                  <a:lnTo>
-                    <a:pt x="4077496" y="2877263"/>
-                  </a:lnTo>
-                  <a:lnTo>
-                    <a:pt x="4149118" y="2886544"/>
-                  </a:lnTo>
-                  <a:lnTo>
-                    <a:pt x="4220741" y="2895683"/>
-                  </a:lnTo>
-                  <a:lnTo>
-                    <a:pt x="4292363" y="2904681"/>
-                  </a:lnTo>
-                  <a:lnTo>
-                    <a:pt x="4363986" y="2913542"/>
-                  </a:lnTo>
-                  <a:lnTo>
-                    <a:pt x="4435608" y="2922268"/>
-                  </a:lnTo>
-                  <a:lnTo>
-                    <a:pt x="4507231" y="2930860"/>
-                  </a:lnTo>
-                  <a:lnTo>
-                    <a:pt x="4578853" y="2939320"/>
-                  </a:lnTo>
-                  <a:lnTo>
-                    <a:pt x="4650476" y="2947651"/>
-                  </a:lnTo>
-                  <a:lnTo>
-                    <a:pt x="4722098" y="2955855"/>
-                  </a:lnTo>
-                  <a:lnTo>
-                    <a:pt x="4793721" y="2963933"/>
-                  </a:lnTo>
-                  <a:lnTo>
-                    <a:pt x="4865343" y="2971887"/>
-                  </a:lnTo>
-                  <a:lnTo>
-                    <a:pt x="4936966" y="2979720"/>
-                  </a:lnTo>
-                  <a:lnTo>
-                    <a:pt x="5008588" y="2987433"/>
-                  </a:lnTo>
-                  <a:lnTo>
-                    <a:pt x="5080211" y="2995027"/>
-                  </a:lnTo>
-                  <a:lnTo>
-                    <a:pt x="5151834" y="3002506"/>
-                  </a:lnTo>
-                  <a:lnTo>
-                    <a:pt x="5223456" y="3009870"/>
-                  </a:lnTo>
-                  <a:lnTo>
-                    <a:pt x="5295079" y="3017122"/>
-                  </a:lnTo>
-                  <a:lnTo>
-                    <a:pt x="5366701" y="3024262"/>
-                  </a:lnTo>
-                  <a:lnTo>
-                    <a:pt x="5438324" y="3031293"/>
-                  </a:lnTo>
-                  <a:lnTo>
-                    <a:pt x="5509946" y="3038217"/>
-                  </a:lnTo>
-                  <a:lnTo>
-                    <a:pt x="5581569" y="3045035"/>
-                  </a:lnTo>
-                  <a:lnTo>
-                    <a:pt x="5653191" y="3051748"/>
-                  </a:lnTo>
-                  <a:lnTo>
-                    <a:pt x="5724814" y="3058358"/>
-                  </a:lnTo>
-                  <a:lnTo>
-                    <a:pt x="5796436" y="3064868"/>
-                  </a:lnTo>
-                  <a:lnTo>
-                    <a:pt x="5868059" y="3071278"/>
-                  </a:lnTo>
-                  <a:lnTo>
-                    <a:pt x="5939681" y="3077589"/>
-                  </a:lnTo>
-                  <a:lnTo>
-                    <a:pt x="6011304" y="3083805"/>
-                  </a:lnTo>
-                  <a:lnTo>
-                    <a:pt x="6082926" y="3089925"/>
-                  </a:lnTo>
-                  <a:lnTo>
-                    <a:pt x="6154549" y="3095951"/>
-                  </a:lnTo>
-                  <a:lnTo>
-                    <a:pt x="6226171" y="3101885"/>
-                  </a:lnTo>
-                  <a:lnTo>
-                    <a:pt x="6297794" y="3107729"/>
+                    <a:pt x="58910" y="111172"/>
+                  </a:lnTo>
+                  <a:lnTo>
+                    <a:pt x="130533" y="241126"/>
+                  </a:lnTo>
+                  <a:lnTo>
+                    <a:pt x="202155" y="366072"/>
+                  </a:lnTo>
+                  <a:lnTo>
+                    <a:pt x="273778" y="486204"/>
+                  </a:lnTo>
+                  <a:lnTo>
+                    <a:pt x="345400" y="601706"/>
+                  </a:lnTo>
+                  <a:lnTo>
+                    <a:pt x="417023" y="712758"/>
+                  </a:lnTo>
+                  <a:lnTo>
+                    <a:pt x="488645" y="819531"/>
+                  </a:lnTo>
+                  <a:lnTo>
+                    <a:pt x="560268" y="922190"/>
+                  </a:lnTo>
+                  <a:lnTo>
+                    <a:pt x="631890" y="1020893"/>
+                  </a:lnTo>
+                  <a:lnTo>
+                    <a:pt x="703513" y="1115793"/>
+                  </a:lnTo>
+                  <a:lnTo>
+                    <a:pt x="775135" y="1207036"/>
+                  </a:lnTo>
+                  <a:lnTo>
+                    <a:pt x="846758" y="1294763"/>
+                  </a:lnTo>
+                  <a:lnTo>
+                    <a:pt x="918380" y="1379110"/>
+                  </a:lnTo>
+                  <a:lnTo>
+                    <a:pt x="990003" y="1460207"/>
+                  </a:lnTo>
+                  <a:lnTo>
+                    <a:pt x="1061626" y="1538179"/>
+                  </a:lnTo>
+                  <a:lnTo>
+                    <a:pt x="1133248" y="1613146"/>
+                  </a:lnTo>
+                  <a:lnTo>
+                    <a:pt x="1204871" y="1685225"/>
+                  </a:lnTo>
+                  <a:lnTo>
+                    <a:pt x="1276493" y="1754527"/>
+                  </a:lnTo>
+                  <a:lnTo>
+                    <a:pt x="1348116" y="1821158"/>
+                  </a:lnTo>
+                  <a:lnTo>
+                    <a:pt x="1419738" y="1885221"/>
+                  </a:lnTo>
+                  <a:lnTo>
+                    <a:pt x="1491361" y="1946817"/>
+                  </a:lnTo>
+                  <a:lnTo>
+                    <a:pt x="1562983" y="2006038"/>
+                  </a:lnTo>
+                  <a:lnTo>
+                    <a:pt x="1634606" y="2062978"/>
+                  </a:lnTo>
+                  <a:lnTo>
+                    <a:pt x="1706228" y="2117724"/>
+                  </a:lnTo>
+                  <a:lnTo>
+                    <a:pt x="1777851" y="2170360"/>
+                  </a:lnTo>
+                  <a:lnTo>
+                    <a:pt x="1849473" y="2220968"/>
+                  </a:lnTo>
+                  <a:lnTo>
+                    <a:pt x="1921096" y="2269626"/>
+                  </a:lnTo>
+                  <a:lnTo>
+                    <a:pt x="1992718" y="2316409"/>
+                  </a:lnTo>
+                  <a:lnTo>
+                    <a:pt x="2064341" y="2361389"/>
+                  </a:lnTo>
+                  <a:lnTo>
+                    <a:pt x="2135963" y="2404636"/>
+                  </a:lnTo>
+                  <a:lnTo>
+                    <a:pt x="2207586" y="2446217"/>
+                  </a:lnTo>
+                  <a:lnTo>
+                    <a:pt x="2279208" y="2486196"/>
+                  </a:lnTo>
+                  <a:lnTo>
+                    <a:pt x="2350831" y="2524634"/>
+                  </a:lnTo>
+                  <a:lnTo>
+                    <a:pt x="2422454" y="2561591"/>
+                  </a:lnTo>
+                  <a:lnTo>
+                    <a:pt x="2494076" y="2597124"/>
+                  </a:lnTo>
+                  <a:lnTo>
+                    <a:pt x="2565699" y="2631288"/>
+                  </a:lnTo>
+                  <a:lnTo>
+                    <a:pt x="2637321" y="2658179"/>
+                  </a:lnTo>
+                  <a:lnTo>
+                    <a:pt x="2708944" y="2670863"/>
+                  </a:lnTo>
+                  <a:lnTo>
+                    <a:pt x="2780566" y="2683352"/>
+                  </a:lnTo>
+                  <a:lnTo>
+                    <a:pt x="2852189" y="2695650"/>
+                  </a:lnTo>
+                  <a:lnTo>
+                    <a:pt x="2923811" y="2707758"/>
+                  </a:lnTo>
+                  <a:lnTo>
+                    <a:pt x="2995434" y="2719680"/>
+                  </a:lnTo>
+                  <a:lnTo>
+                    <a:pt x="3067056" y="2731419"/>
+                  </a:lnTo>
+                  <a:lnTo>
+                    <a:pt x="3138679" y="2742978"/>
+                  </a:lnTo>
+                  <a:lnTo>
+                    <a:pt x="3210301" y="2754360"/>
+                  </a:lnTo>
+                  <a:lnTo>
+                    <a:pt x="3281924" y="2765566"/>
+                  </a:lnTo>
+                  <a:lnTo>
+                    <a:pt x="3353546" y="2776600"/>
+                  </a:lnTo>
+                  <a:lnTo>
+                    <a:pt x="3425169" y="2787465"/>
+                  </a:lnTo>
+                  <a:lnTo>
+                    <a:pt x="3496791" y="2798162"/>
+                  </a:lnTo>
+                  <a:lnTo>
+                    <a:pt x="3568414" y="2808696"/>
+                  </a:lnTo>
+                  <a:lnTo>
+                    <a:pt x="3640036" y="2819067"/>
+                  </a:lnTo>
+                  <a:lnTo>
+                    <a:pt x="3711659" y="2829280"/>
+                  </a:lnTo>
+                  <a:lnTo>
+                    <a:pt x="3783282" y="2839335"/>
+                  </a:lnTo>
+                  <a:lnTo>
+                    <a:pt x="3854904" y="2849236"/>
+                  </a:lnTo>
+                  <a:lnTo>
+                    <a:pt x="3926527" y="2858984"/>
+                  </a:lnTo>
+                  <a:lnTo>
+                    <a:pt x="3998149" y="2868583"/>
+                  </a:lnTo>
+                  <a:lnTo>
+                    <a:pt x="4069772" y="2878035"/>
+                  </a:lnTo>
+                  <a:lnTo>
+                    <a:pt x="4141394" y="2887341"/>
+                  </a:lnTo>
+                  <a:lnTo>
+                    <a:pt x="4213017" y="2896504"/>
+                  </a:lnTo>
+                  <a:lnTo>
+                    <a:pt x="4284639" y="2905526"/>
+                  </a:lnTo>
+                  <a:lnTo>
+                    <a:pt x="4356262" y="2914410"/>
+                  </a:lnTo>
+                  <a:lnTo>
+                    <a:pt x="4427884" y="2923158"/>
+                  </a:lnTo>
+                  <a:lnTo>
+                    <a:pt x="4499507" y="2931771"/>
+                  </a:lnTo>
+                  <a:lnTo>
+                    <a:pt x="4571129" y="2940251"/>
+                  </a:lnTo>
+                  <a:lnTo>
+                    <a:pt x="4642752" y="2948601"/>
+                  </a:lnTo>
+                  <a:lnTo>
+                    <a:pt x="4714374" y="2956823"/>
+                  </a:lnTo>
+                  <a:lnTo>
+                    <a:pt x="4785997" y="2964919"/>
+                  </a:lnTo>
+                  <a:lnTo>
+                    <a:pt x="4857619" y="2972890"/>
+                  </a:lnTo>
+                  <a:lnTo>
+                    <a:pt x="4929242" y="2980739"/>
+                  </a:lnTo>
+                  <a:lnTo>
+                    <a:pt x="5000864" y="2988468"/>
+                  </a:lnTo>
+                  <a:lnTo>
+                    <a:pt x="5072487" y="2996077"/>
+                  </a:lnTo>
+                  <a:lnTo>
+                    <a:pt x="5144110" y="3003570"/>
+                  </a:lnTo>
+                  <a:lnTo>
+                    <a:pt x="5215732" y="3010947"/>
+                  </a:lnTo>
+                  <a:lnTo>
+                    <a:pt x="5287355" y="3018211"/>
+                  </a:lnTo>
+                  <a:lnTo>
+                    <a:pt x="5358977" y="3025364"/>
+                  </a:lnTo>
+                  <a:lnTo>
+                    <a:pt x="5430600" y="3032406"/>
+                  </a:lnTo>
+                  <a:lnTo>
+                    <a:pt x="5502222" y="3039341"/>
+                  </a:lnTo>
+                  <a:lnTo>
+                    <a:pt x="5573845" y="3046169"/>
+                  </a:lnTo>
+                  <a:lnTo>
+                    <a:pt x="5645467" y="3052892"/>
+                  </a:lnTo>
+                  <a:lnTo>
+                    <a:pt x="5717090" y="3059511"/>
+                  </a:lnTo>
+                  <a:lnTo>
+                    <a:pt x="5788712" y="3066029"/>
+                  </a:lnTo>
+                  <a:lnTo>
+                    <a:pt x="5860335" y="3072447"/>
+                  </a:lnTo>
+                  <a:lnTo>
+                    <a:pt x="5931957" y="3078766"/>
+                  </a:lnTo>
+                  <a:lnTo>
+                    <a:pt x="6003580" y="3084989"/>
+                  </a:lnTo>
+                  <a:lnTo>
+                    <a:pt x="6075202" y="3091115"/>
+                  </a:lnTo>
+                  <a:lnTo>
+                    <a:pt x="6146825" y="3097148"/>
+                  </a:lnTo>
+                  <a:lnTo>
+                    <a:pt x="6218447" y="3103087"/>
+                  </a:lnTo>
+                  <a:lnTo>
+                    <a:pt x="6290070" y="3108936"/>
                   </a:lnTo>
                 </a:path>
               </a:pathLst>
@@ -3849,309 +3849,309 @@
           </p:nvSpPr>
           <p:spPr>
             <a:xfrm>
-              <a:off x="1172049" y="3826548"/>
-              <a:ext cx="7090630" cy="1619575"/>
+              <a:off x="1172049" y="3821367"/>
+              <a:ext cx="7090630" cy="1625404"/>
             </a:xfrm>
             <a:custGeom>
               <a:avLst/>
               <a:pathLst>
-                <a:path w="7090630" h="1619575">
+                <a:path w="7090630" h="1625404">
                   <a:moveTo>
-                    <a:pt x="7090630" y="1619575"/>
+                    <a:pt x="7090630" y="1625404"/>
                   </a:moveTo>
                   <a:lnTo>
-                    <a:pt x="7019007" y="1615135"/>
-                  </a:lnTo>
-                  <a:lnTo>
-                    <a:pt x="6947385" y="1610517"/>
-                  </a:lnTo>
-                  <a:lnTo>
-                    <a:pt x="6875762" y="1605714"/>
-                  </a:lnTo>
-                  <a:lnTo>
-                    <a:pt x="6804139" y="1600720"/>
-                  </a:lnTo>
-                  <a:lnTo>
-                    <a:pt x="6732517" y="1595526"/>
-                  </a:lnTo>
-                  <a:lnTo>
-                    <a:pt x="6660894" y="1590125"/>
-                  </a:lnTo>
-                  <a:lnTo>
-                    <a:pt x="6589272" y="1584508"/>
-                  </a:lnTo>
-                  <a:lnTo>
-                    <a:pt x="6517649" y="1578666"/>
-                  </a:lnTo>
-                  <a:lnTo>
-                    <a:pt x="6446027" y="1572591"/>
-                  </a:lnTo>
-                  <a:lnTo>
-                    <a:pt x="6374404" y="1566274"/>
-                  </a:lnTo>
-                  <a:lnTo>
-                    <a:pt x="6302782" y="1559704"/>
-                  </a:lnTo>
-                  <a:lnTo>
-                    <a:pt x="6231159" y="1552871"/>
-                  </a:lnTo>
-                  <a:lnTo>
-                    <a:pt x="6159537" y="1545765"/>
-                  </a:lnTo>
-                  <a:lnTo>
-                    <a:pt x="6087914" y="1538375"/>
-                  </a:lnTo>
-                  <a:lnTo>
-                    <a:pt x="6016292" y="1530690"/>
-                  </a:lnTo>
-                  <a:lnTo>
-                    <a:pt x="5944669" y="1522698"/>
-                  </a:lnTo>
-                  <a:lnTo>
-                    <a:pt x="5873047" y="1514387"/>
-                  </a:lnTo>
-                  <a:lnTo>
-                    <a:pt x="5801424" y="1505743"/>
-                  </a:lnTo>
-                  <a:lnTo>
-                    <a:pt x="5729802" y="1496755"/>
-                  </a:lnTo>
-                  <a:lnTo>
-                    <a:pt x="5658179" y="1487407"/>
-                  </a:lnTo>
-                  <a:lnTo>
-                    <a:pt x="5586557" y="1477685"/>
-                  </a:lnTo>
-                  <a:lnTo>
-                    <a:pt x="5514934" y="1467575"/>
-                  </a:lnTo>
-                  <a:lnTo>
-                    <a:pt x="5443311" y="1457061"/>
-                  </a:lnTo>
-                  <a:lnTo>
-                    <a:pt x="5371689" y="1446127"/>
-                  </a:lnTo>
-                  <a:lnTo>
-                    <a:pt x="5300066" y="1434756"/>
-                  </a:lnTo>
-                  <a:lnTo>
-                    <a:pt x="5228444" y="1422930"/>
-                  </a:lnTo>
-                  <a:lnTo>
-                    <a:pt x="5156821" y="1410632"/>
-                  </a:lnTo>
-                  <a:lnTo>
-                    <a:pt x="5085199" y="1397843"/>
-                  </a:lnTo>
-                  <a:lnTo>
-                    <a:pt x="5013576" y="1384543"/>
-                  </a:lnTo>
-                  <a:lnTo>
-                    <a:pt x="4941954" y="1370711"/>
-                  </a:lnTo>
-                  <a:lnTo>
-                    <a:pt x="4870331" y="1356326"/>
-                  </a:lnTo>
-                  <a:lnTo>
-                    <a:pt x="4798709" y="1341367"/>
-                  </a:lnTo>
-                  <a:lnTo>
-                    <a:pt x="4727086" y="1325810"/>
-                  </a:lnTo>
-                  <a:lnTo>
-                    <a:pt x="4655464" y="1309631"/>
-                  </a:lnTo>
-                  <a:lnTo>
-                    <a:pt x="4583841" y="1292806"/>
-                  </a:lnTo>
-                  <a:lnTo>
-                    <a:pt x="4512219" y="1275309"/>
-                  </a:lnTo>
-                  <a:lnTo>
-                    <a:pt x="4440596" y="1257112"/>
-                  </a:lnTo>
-                  <a:lnTo>
-                    <a:pt x="4368974" y="1238188"/>
-                  </a:lnTo>
-                  <a:lnTo>
-                    <a:pt x="4297351" y="1218509"/>
-                  </a:lnTo>
-                  <a:lnTo>
-                    <a:pt x="4225729" y="1198042"/>
-                  </a:lnTo>
-                  <a:lnTo>
-                    <a:pt x="4154106" y="1176758"/>
-                  </a:lnTo>
-                  <a:lnTo>
-                    <a:pt x="4082483" y="1154624"/>
-                  </a:lnTo>
-                  <a:lnTo>
-                    <a:pt x="4010861" y="1131605"/>
-                  </a:lnTo>
-                  <a:lnTo>
-                    <a:pt x="3939238" y="1107666"/>
-                  </a:lnTo>
-                  <a:lnTo>
-                    <a:pt x="3867616" y="1082771"/>
-                  </a:lnTo>
-                  <a:lnTo>
-                    <a:pt x="3795993" y="1056881"/>
-                  </a:lnTo>
-                  <a:lnTo>
-                    <a:pt x="3724371" y="1029956"/>
-                  </a:lnTo>
-                  <a:lnTo>
-                    <a:pt x="3652748" y="1001956"/>
-                  </a:lnTo>
-                  <a:lnTo>
-                    <a:pt x="3581126" y="972836"/>
-                  </a:lnTo>
-                  <a:lnTo>
-                    <a:pt x="3509503" y="942553"/>
-                  </a:lnTo>
-                  <a:lnTo>
-                    <a:pt x="3437881" y="911061"/>
-                  </a:lnTo>
-                  <a:lnTo>
-                    <a:pt x="3366258" y="892288"/>
-                  </a:lnTo>
-                  <a:lnTo>
-                    <a:pt x="3294636" y="879258"/>
-                  </a:lnTo>
-                  <a:lnTo>
-                    <a:pt x="3223013" y="866027"/>
-                  </a:lnTo>
-                  <a:lnTo>
-                    <a:pt x="3151391" y="852590"/>
-                  </a:lnTo>
-                  <a:lnTo>
-                    <a:pt x="3079768" y="838944"/>
-                  </a:lnTo>
-                  <a:lnTo>
-                    <a:pt x="3008146" y="825086"/>
-                  </a:lnTo>
-                  <a:lnTo>
-                    <a:pt x="2936523" y="811012"/>
-                  </a:lnTo>
-                  <a:lnTo>
-                    <a:pt x="2864901" y="796720"/>
-                  </a:lnTo>
-                  <a:lnTo>
-                    <a:pt x="2793278" y="782206"/>
-                  </a:lnTo>
-                  <a:lnTo>
-                    <a:pt x="2721655" y="767466"/>
-                  </a:lnTo>
-                  <a:lnTo>
-                    <a:pt x="2650033" y="752497"/>
-                  </a:lnTo>
-                  <a:lnTo>
-                    <a:pt x="2578410" y="737296"/>
-                  </a:lnTo>
-                  <a:lnTo>
-                    <a:pt x="2506788" y="721858"/>
-                  </a:lnTo>
-                  <a:lnTo>
-                    <a:pt x="2435165" y="706181"/>
-                  </a:lnTo>
-                  <a:lnTo>
-                    <a:pt x="2363543" y="690259"/>
-                  </a:lnTo>
-                  <a:lnTo>
-                    <a:pt x="2291920" y="674091"/>
-                  </a:lnTo>
-                  <a:lnTo>
-                    <a:pt x="2220298" y="657671"/>
-                  </a:lnTo>
-                  <a:lnTo>
-                    <a:pt x="2148675" y="640996"/>
-                  </a:lnTo>
-                  <a:lnTo>
-                    <a:pt x="2077053" y="624062"/>
-                  </a:lnTo>
-                  <a:lnTo>
-                    <a:pt x="2005430" y="606864"/>
-                  </a:lnTo>
-                  <a:lnTo>
-                    <a:pt x="1933808" y="589400"/>
-                  </a:lnTo>
-                  <a:lnTo>
-                    <a:pt x="1862185" y="571664"/>
-                  </a:lnTo>
-                  <a:lnTo>
-                    <a:pt x="1790563" y="553652"/>
-                  </a:lnTo>
-                  <a:lnTo>
-                    <a:pt x="1718940" y="535360"/>
-                  </a:lnTo>
-                  <a:lnTo>
-                    <a:pt x="1647318" y="516785"/>
-                  </a:lnTo>
-                  <a:lnTo>
-                    <a:pt x="1575695" y="497920"/>
-                  </a:lnTo>
-                  <a:lnTo>
-                    <a:pt x="1504073" y="478763"/>
-                  </a:lnTo>
-                  <a:lnTo>
-                    <a:pt x="1432450" y="459307"/>
-                  </a:lnTo>
-                  <a:lnTo>
-                    <a:pt x="1360827" y="439550"/>
-                  </a:lnTo>
-                  <a:lnTo>
-                    <a:pt x="1289205" y="419485"/>
-                  </a:lnTo>
-                  <a:lnTo>
-                    <a:pt x="1217582" y="399108"/>
-                  </a:lnTo>
-                  <a:lnTo>
-                    <a:pt x="1145960" y="378415"/>
-                  </a:lnTo>
-                  <a:lnTo>
-                    <a:pt x="1074337" y="357400"/>
-                  </a:lnTo>
-                  <a:lnTo>
-                    <a:pt x="1002715" y="336059"/>
-                  </a:lnTo>
-                  <a:lnTo>
-                    <a:pt x="931092" y="314386"/>
-                  </a:lnTo>
-                  <a:lnTo>
-                    <a:pt x="859470" y="292376"/>
-                  </a:lnTo>
-                  <a:lnTo>
-                    <a:pt x="787847" y="270025"/>
-                  </a:lnTo>
-                  <a:lnTo>
-                    <a:pt x="716225" y="247325"/>
-                  </a:lnTo>
-                  <a:lnTo>
-                    <a:pt x="644602" y="224274"/>
-                  </a:lnTo>
-                  <a:lnTo>
-                    <a:pt x="572980" y="200863"/>
-                  </a:lnTo>
-                  <a:lnTo>
-                    <a:pt x="501357" y="177089"/>
-                  </a:lnTo>
-                  <a:lnTo>
-                    <a:pt x="429735" y="152946"/>
-                  </a:lnTo>
-                  <a:lnTo>
-                    <a:pt x="358112" y="128428"/>
-                  </a:lnTo>
-                  <a:lnTo>
-                    <a:pt x="286490" y="103528"/>
-                  </a:lnTo>
-                  <a:lnTo>
-                    <a:pt x="214867" y="78241"/>
-                  </a:lnTo>
-                  <a:lnTo>
-                    <a:pt x="143245" y="52562"/>
-                  </a:lnTo>
-                  <a:lnTo>
-                    <a:pt x="71622" y="26483"/>
+                    <a:pt x="7019007" y="1620977"/>
+                  </a:lnTo>
+                  <a:lnTo>
+                    <a:pt x="6947385" y="1616372"/>
+                  </a:lnTo>
+                  <a:lnTo>
+                    <a:pt x="6875762" y="1611582"/>
+                  </a:lnTo>
+                  <a:lnTo>
+                    <a:pt x="6804139" y="1606601"/>
+                  </a:lnTo>
+                  <a:lnTo>
+                    <a:pt x="6732517" y="1601419"/>
+                  </a:lnTo>
+                  <a:lnTo>
+                    <a:pt x="6660894" y="1596031"/>
+                  </a:lnTo>
+                  <a:lnTo>
+                    <a:pt x="6589272" y="1590426"/>
+                  </a:lnTo>
+                  <a:lnTo>
+                    <a:pt x="6517649" y="1584596"/>
+                  </a:lnTo>
+                  <a:lnTo>
+                    <a:pt x="6446027" y="1578533"/>
+                  </a:lnTo>
+                  <a:lnTo>
+                    <a:pt x="6374404" y="1572227"/>
+                  </a:lnTo>
+                  <a:lnTo>
+                    <a:pt x="6302782" y="1565669"/>
+                  </a:lnTo>
+                  <a:lnTo>
+                    <a:pt x="6231159" y="1558847"/>
+                  </a:lnTo>
+                  <a:lnTo>
+                    <a:pt x="6159537" y="1551752"/>
+                  </a:lnTo>
+                  <a:lnTo>
+                    <a:pt x="6087914" y="1544373"/>
+                  </a:lnTo>
+                  <a:lnTo>
+                    <a:pt x="6016292" y="1536698"/>
+                  </a:lnTo>
+                  <a:lnTo>
+                    <a:pt x="5944669" y="1528715"/>
+                  </a:lnTo>
+                  <a:lnTo>
+                    <a:pt x="5873047" y="1520413"/>
+                  </a:lnTo>
+                  <a:lnTo>
+                    <a:pt x="5801424" y="1511777"/>
+                  </a:lnTo>
+                  <a:lnTo>
+                    <a:pt x="5729802" y="1502796"/>
+                  </a:lnTo>
+                  <a:lnTo>
+                    <a:pt x="5658179" y="1493455"/>
+                  </a:lnTo>
+                  <a:lnTo>
+                    <a:pt x="5586557" y="1483739"/>
+                  </a:lnTo>
+                  <a:lnTo>
+                    <a:pt x="5514934" y="1473634"/>
+                  </a:lnTo>
+                  <a:lnTo>
+                    <a:pt x="5443311" y="1463124"/>
+                  </a:lnTo>
+                  <a:lnTo>
+                    <a:pt x="5371689" y="1452192"/>
+                  </a:lnTo>
+                  <a:lnTo>
+                    <a:pt x="5300066" y="1440823"/>
+                  </a:lnTo>
+                  <a:lnTo>
+                    <a:pt x="5228444" y="1428998"/>
+                  </a:lnTo>
+                  <a:lnTo>
+                    <a:pt x="5156821" y="1416699"/>
+                  </a:lnTo>
+                  <a:lnTo>
+                    <a:pt x="5085199" y="1403908"/>
+                  </a:lnTo>
+                  <a:lnTo>
+                    <a:pt x="5013576" y="1390603"/>
+                  </a:lnTo>
+                  <a:lnTo>
+                    <a:pt x="4941954" y="1376765"/>
+                  </a:lnTo>
+                  <a:lnTo>
+                    <a:pt x="4870331" y="1362373"/>
+                  </a:lnTo>
+                  <a:lnTo>
+                    <a:pt x="4798709" y="1347404"/>
+                  </a:lnTo>
+                  <a:lnTo>
+                    <a:pt x="4727086" y="1331835"/>
+                  </a:lnTo>
+                  <a:lnTo>
+                    <a:pt x="4655464" y="1315642"/>
+                  </a:lnTo>
+                  <a:lnTo>
+                    <a:pt x="4583841" y="1298801"/>
+                  </a:lnTo>
+                  <a:lnTo>
+                    <a:pt x="4512219" y="1281284"/>
+                  </a:lnTo>
+                  <a:lnTo>
+                    <a:pt x="4440596" y="1263065"/>
+                  </a:lnTo>
+                  <a:lnTo>
+                    <a:pt x="4368974" y="1244116"/>
+                  </a:lnTo>
+                  <a:lnTo>
+                    <a:pt x="4297351" y="1224408"/>
+                  </a:lnTo>
+                  <a:lnTo>
+                    <a:pt x="4225729" y="1203910"/>
+                  </a:lnTo>
+                  <a:lnTo>
+                    <a:pt x="4154106" y="1182590"/>
+                  </a:lnTo>
+                  <a:lnTo>
+                    <a:pt x="4082483" y="1160416"/>
+                  </a:lnTo>
+                  <a:lnTo>
+                    <a:pt x="4010861" y="1137353"/>
+                  </a:lnTo>
+                  <a:lnTo>
+                    <a:pt x="3939238" y="1113366"/>
+                  </a:lnTo>
+                  <a:lnTo>
+                    <a:pt x="3867616" y="1088418"/>
+                  </a:lnTo>
+                  <a:lnTo>
+                    <a:pt x="3795993" y="1062469"/>
+                  </a:lnTo>
+                  <a:lnTo>
+                    <a:pt x="3724371" y="1035481"/>
+                  </a:lnTo>
+                  <a:lnTo>
+                    <a:pt x="3652748" y="1007411"/>
+                  </a:lnTo>
+                  <a:lnTo>
+                    <a:pt x="3581126" y="978217"/>
+                  </a:lnTo>
+                  <a:lnTo>
+                    <a:pt x="3509503" y="947852"/>
+                  </a:lnTo>
+                  <a:lnTo>
+                    <a:pt x="3437881" y="916270"/>
+                  </a:lnTo>
+                  <a:lnTo>
+                    <a:pt x="3366258" y="897432"/>
+                  </a:lnTo>
+                  <a:lnTo>
+                    <a:pt x="3294636" y="884349"/>
+                  </a:lnTo>
+                  <a:lnTo>
+                    <a:pt x="3223013" y="871062"/>
+                  </a:lnTo>
+                  <a:lnTo>
+                    <a:pt x="3151391" y="857568"/>
+                  </a:lnTo>
+                  <a:lnTo>
+                    <a:pt x="3079768" y="843863"/>
+                  </a:lnTo>
+                  <a:lnTo>
+                    <a:pt x="3008146" y="829944"/>
+                  </a:lnTo>
+                  <a:lnTo>
+                    <a:pt x="2936523" y="815808"/>
+                  </a:lnTo>
+                  <a:lnTo>
+                    <a:pt x="2864901" y="801451"/>
+                  </a:lnTo>
+                  <a:lnTo>
+                    <a:pt x="2793278" y="786870"/>
+                  </a:lnTo>
+                  <a:lnTo>
+                    <a:pt x="2721655" y="772062"/>
+                  </a:lnTo>
+                  <a:lnTo>
+                    <a:pt x="2650033" y="757023"/>
+                  </a:lnTo>
+                  <a:lnTo>
+                    <a:pt x="2578410" y="741749"/>
+                  </a:lnTo>
+                  <a:lnTo>
+                    <a:pt x="2506788" y="726237"/>
+                  </a:lnTo>
+                  <a:lnTo>
+                    <a:pt x="2435165" y="710482"/>
+                  </a:lnTo>
+                  <a:lnTo>
+                    <a:pt x="2363543" y="694482"/>
+                  </a:lnTo>
+                  <a:lnTo>
+                    <a:pt x="2291920" y="678232"/>
+                  </a:lnTo>
+                  <a:lnTo>
+                    <a:pt x="2220298" y="661729"/>
+                  </a:lnTo>
+                  <a:lnTo>
+                    <a:pt x="2148675" y="644968"/>
+                  </a:lnTo>
+                  <a:lnTo>
+                    <a:pt x="2077053" y="627946"/>
+                  </a:lnTo>
+                  <a:lnTo>
+                    <a:pt x="2005430" y="610657"/>
+                  </a:lnTo>
+                  <a:lnTo>
+                    <a:pt x="1933808" y="593100"/>
+                  </a:lnTo>
+                  <a:lnTo>
+                    <a:pt x="1862185" y="575268"/>
+                  </a:lnTo>
+                  <a:lnTo>
+                    <a:pt x="1790563" y="557158"/>
+                  </a:lnTo>
+                  <a:lnTo>
+                    <a:pt x="1718940" y="538765"/>
+                  </a:lnTo>
+                  <a:lnTo>
+                    <a:pt x="1647318" y="520086"/>
+                  </a:lnTo>
+                  <a:lnTo>
+                    <a:pt x="1575695" y="501115"/>
+                  </a:lnTo>
+                  <a:lnTo>
+                    <a:pt x="1504073" y="481848"/>
+                  </a:lnTo>
+                  <a:lnTo>
+                    <a:pt x="1432450" y="462280"/>
+                  </a:lnTo>
+                  <a:lnTo>
+                    <a:pt x="1360827" y="442407"/>
+                  </a:lnTo>
+                  <a:lnTo>
+                    <a:pt x="1289205" y="422224"/>
+                  </a:lnTo>
+                  <a:lnTo>
+                    <a:pt x="1217582" y="401725"/>
+                  </a:lnTo>
+                  <a:lnTo>
+                    <a:pt x="1145960" y="380908"/>
+                  </a:lnTo>
+                  <a:lnTo>
+                    <a:pt x="1074337" y="359765"/>
+                  </a:lnTo>
+                  <a:lnTo>
+                    <a:pt x="1002715" y="338292"/>
+                  </a:lnTo>
+                  <a:lnTo>
+                    <a:pt x="931092" y="316484"/>
+                  </a:lnTo>
+                  <a:lnTo>
+                    <a:pt x="859470" y="294336"/>
+                  </a:lnTo>
+                  <a:lnTo>
+                    <a:pt x="787847" y="271843"/>
+                  </a:lnTo>
+                  <a:lnTo>
+                    <a:pt x="716225" y="248998"/>
+                  </a:lnTo>
+                  <a:lnTo>
+                    <a:pt x="644602" y="225797"/>
+                  </a:lnTo>
+                  <a:lnTo>
+                    <a:pt x="572980" y="202234"/>
+                  </a:lnTo>
+                  <a:lnTo>
+                    <a:pt x="501357" y="178303"/>
+                  </a:lnTo>
+                  <a:lnTo>
+                    <a:pt x="429735" y="153999"/>
+                  </a:lnTo>
+                  <a:lnTo>
+                    <a:pt x="358112" y="129316"/>
+                  </a:lnTo>
+                  <a:lnTo>
+                    <a:pt x="286490" y="104247"/>
+                  </a:lnTo>
+                  <a:lnTo>
+                    <a:pt x="214867" y="78787"/>
+                  </a:lnTo>
+                  <a:lnTo>
+                    <a:pt x="143245" y="52930"/>
+                  </a:lnTo>
+                  <a:lnTo>
+                    <a:pt x="71622" y="26670"/>
                   </a:lnTo>
                   <a:lnTo>
                     <a:pt x="0" y="0"/>
@@ -4174,312 +4174,312 @@
           </p:nvSpPr>
           <p:spPr>
             <a:xfrm>
-              <a:off x="1172049" y="2507224"/>
-              <a:ext cx="7090630" cy="2845610"/>
+              <a:off x="1172049" y="2494347"/>
+              <a:ext cx="7090630" cy="2859412"/>
             </a:xfrm>
             <a:custGeom>
               <a:avLst/>
               <a:pathLst>
-                <a:path w="7090630" h="2845610">
+                <a:path w="7090630" h="2859412">
                   <a:moveTo>
                     <a:pt x="0" y="0"/>
                   </a:moveTo>
                   <a:lnTo>
-                    <a:pt x="71622" y="82141"/>
-                  </a:lnTo>
-                  <a:lnTo>
-                    <a:pt x="143245" y="162070"/>
-                  </a:lnTo>
-                  <a:lnTo>
-                    <a:pt x="214867" y="239846"/>
-                  </a:lnTo>
-                  <a:lnTo>
-                    <a:pt x="286490" y="315528"/>
-                  </a:lnTo>
-                  <a:lnTo>
-                    <a:pt x="358112" y="389171"/>
-                  </a:lnTo>
-                  <a:lnTo>
-                    <a:pt x="429735" y="460831"/>
-                  </a:lnTo>
-                  <a:lnTo>
-                    <a:pt x="501357" y="530562"/>
-                  </a:lnTo>
-                  <a:lnTo>
-                    <a:pt x="572980" y="598414"/>
-                  </a:lnTo>
-                  <a:lnTo>
-                    <a:pt x="644602" y="664439"/>
-                  </a:lnTo>
-                  <a:lnTo>
-                    <a:pt x="716225" y="728686"/>
-                  </a:lnTo>
-                  <a:lnTo>
-                    <a:pt x="787847" y="791202"/>
-                  </a:lnTo>
-                  <a:lnTo>
-                    <a:pt x="859470" y="852035"/>
-                  </a:lnTo>
-                  <a:lnTo>
-                    <a:pt x="931092" y="911230"/>
-                  </a:lnTo>
-                  <a:lnTo>
-                    <a:pt x="1002715" y="968831"/>
-                  </a:lnTo>
-                  <a:lnTo>
-                    <a:pt x="1074337" y="1024880"/>
-                  </a:lnTo>
-                  <a:lnTo>
-                    <a:pt x="1145960" y="1079420"/>
-                  </a:lnTo>
-                  <a:lnTo>
-                    <a:pt x="1217582" y="1132490"/>
-                  </a:lnTo>
-                  <a:lnTo>
-                    <a:pt x="1289205" y="1184132"/>
-                  </a:lnTo>
-                  <a:lnTo>
-                    <a:pt x="1360827" y="1234383"/>
-                  </a:lnTo>
-                  <a:lnTo>
-                    <a:pt x="1432450" y="1283281"/>
-                  </a:lnTo>
-                  <a:lnTo>
-                    <a:pt x="1504073" y="1330861"/>
-                  </a:lnTo>
-                  <a:lnTo>
-                    <a:pt x="1575695" y="1377160"/>
-                  </a:lnTo>
-                  <a:lnTo>
-                    <a:pt x="1647318" y="1422213"/>
-                  </a:lnTo>
-                  <a:lnTo>
-                    <a:pt x="1718940" y="1466052"/>
-                  </a:lnTo>
-                  <a:lnTo>
-                    <a:pt x="1790563" y="1508710"/>
-                  </a:lnTo>
-                  <a:lnTo>
-                    <a:pt x="1862185" y="1550220"/>
-                  </a:lnTo>
-                  <a:lnTo>
-                    <a:pt x="1933808" y="1590612"/>
-                  </a:lnTo>
-                  <a:lnTo>
-                    <a:pt x="2005430" y="1629915"/>
-                  </a:lnTo>
-                  <a:lnTo>
-                    <a:pt x="2077053" y="1668161"/>
-                  </a:lnTo>
-                  <a:lnTo>
-                    <a:pt x="2148675" y="1705376"/>
-                  </a:lnTo>
-                  <a:lnTo>
-                    <a:pt x="2220298" y="1741589"/>
-                  </a:lnTo>
-                  <a:lnTo>
-                    <a:pt x="2291920" y="1776827"/>
-                  </a:lnTo>
-                  <a:lnTo>
-                    <a:pt x="2363543" y="1811116"/>
-                  </a:lnTo>
-                  <a:lnTo>
-                    <a:pt x="2435165" y="1844481"/>
-                  </a:lnTo>
-                  <a:lnTo>
-                    <a:pt x="2506788" y="1876948"/>
-                  </a:lnTo>
-                  <a:lnTo>
-                    <a:pt x="2578410" y="1908541"/>
-                  </a:lnTo>
-                  <a:lnTo>
-                    <a:pt x="2650033" y="1939282"/>
-                  </a:lnTo>
-                  <a:lnTo>
-                    <a:pt x="2721655" y="1969196"/>
-                  </a:lnTo>
-                  <a:lnTo>
-                    <a:pt x="2793278" y="1998304"/>
-                  </a:lnTo>
-                  <a:lnTo>
-                    <a:pt x="2864901" y="2026628"/>
-                  </a:lnTo>
-                  <a:lnTo>
-                    <a:pt x="2936523" y="2054190"/>
-                  </a:lnTo>
-                  <a:lnTo>
-                    <a:pt x="3008146" y="2081009"/>
-                  </a:lnTo>
-                  <a:lnTo>
-                    <a:pt x="3079768" y="2107106"/>
-                  </a:lnTo>
-                  <a:lnTo>
-                    <a:pt x="3151391" y="2132500"/>
-                  </a:lnTo>
-                  <a:lnTo>
-                    <a:pt x="3223013" y="2157210"/>
-                  </a:lnTo>
-                  <a:lnTo>
-                    <a:pt x="3294636" y="2181254"/>
-                  </a:lnTo>
-                  <a:lnTo>
-                    <a:pt x="3366258" y="2204651"/>
-                  </a:lnTo>
-                  <a:lnTo>
-                    <a:pt x="3437881" y="2227418"/>
-                  </a:lnTo>
-                  <a:lnTo>
-                    <a:pt x="3509503" y="2249572"/>
-                  </a:lnTo>
-                  <a:lnTo>
-                    <a:pt x="3581126" y="2271129"/>
-                  </a:lnTo>
-                  <a:lnTo>
-                    <a:pt x="3652748" y="2292106"/>
-                  </a:lnTo>
-                  <a:lnTo>
-                    <a:pt x="3724371" y="2312518"/>
-                  </a:lnTo>
-                  <a:lnTo>
-                    <a:pt x="3795993" y="2332380"/>
-                  </a:lnTo>
-                  <a:lnTo>
-                    <a:pt x="3867616" y="2351707"/>
-                  </a:lnTo>
-                  <a:lnTo>
-                    <a:pt x="3939238" y="2370514"/>
-                  </a:lnTo>
-                  <a:lnTo>
-                    <a:pt x="4010861" y="2388814"/>
-                  </a:lnTo>
-                  <a:lnTo>
-                    <a:pt x="4082483" y="2406621"/>
-                  </a:lnTo>
-                  <a:lnTo>
-                    <a:pt x="4154106" y="2423949"/>
-                  </a:lnTo>
-                  <a:lnTo>
-                    <a:pt x="4225729" y="2440810"/>
-                  </a:lnTo>
-                  <a:lnTo>
-                    <a:pt x="4297351" y="2457217"/>
-                  </a:lnTo>
-                  <a:lnTo>
-                    <a:pt x="4368974" y="2473182"/>
-                  </a:lnTo>
-                  <a:lnTo>
-                    <a:pt x="4440596" y="2488717"/>
-                  </a:lnTo>
-                  <a:lnTo>
-                    <a:pt x="4512219" y="2503833"/>
-                  </a:lnTo>
-                  <a:lnTo>
-                    <a:pt x="4583841" y="2518543"/>
-                  </a:lnTo>
-                  <a:lnTo>
-                    <a:pt x="4655464" y="2532857"/>
-                  </a:lnTo>
-                  <a:lnTo>
-                    <a:pt x="4727086" y="2546785"/>
-                  </a:lnTo>
-                  <a:lnTo>
-                    <a:pt x="4798709" y="2560337"/>
-                  </a:lnTo>
-                  <a:lnTo>
-                    <a:pt x="4870331" y="2573525"/>
-                  </a:lnTo>
-                  <a:lnTo>
-                    <a:pt x="4941954" y="2586358"/>
-                  </a:lnTo>
-                  <a:lnTo>
-                    <a:pt x="5013576" y="2598845"/>
-                  </a:lnTo>
-                  <a:lnTo>
-                    <a:pt x="5085199" y="2610996"/>
-                  </a:lnTo>
-                  <a:lnTo>
-                    <a:pt x="5156821" y="2622820"/>
-                  </a:lnTo>
-                  <a:lnTo>
-                    <a:pt x="5228444" y="2634325"/>
-                  </a:lnTo>
-                  <a:lnTo>
-                    <a:pt x="5300066" y="2645520"/>
-                  </a:lnTo>
-                  <a:lnTo>
-                    <a:pt x="5371689" y="2656414"/>
-                  </a:lnTo>
-                  <a:lnTo>
-                    <a:pt x="5443311" y="2667014"/>
-                  </a:lnTo>
-                  <a:lnTo>
-                    <a:pt x="5514934" y="2677329"/>
-                  </a:lnTo>
-                  <a:lnTo>
-                    <a:pt x="5586557" y="2687367"/>
-                  </a:lnTo>
-                  <a:lnTo>
-                    <a:pt x="5658179" y="2697133"/>
-                  </a:lnTo>
-                  <a:lnTo>
-                    <a:pt x="5729802" y="2706637"/>
-                  </a:lnTo>
-                  <a:lnTo>
-                    <a:pt x="5801424" y="2715885"/>
-                  </a:lnTo>
-                  <a:lnTo>
-                    <a:pt x="5873047" y="2724884"/>
-                  </a:lnTo>
-                  <a:lnTo>
-                    <a:pt x="5944669" y="2733640"/>
-                  </a:lnTo>
-                  <a:lnTo>
-                    <a:pt x="6016292" y="2742161"/>
-                  </a:lnTo>
-                  <a:lnTo>
-                    <a:pt x="6087914" y="2750452"/>
-                  </a:lnTo>
-                  <a:lnTo>
-                    <a:pt x="6159537" y="2758520"/>
-                  </a:lnTo>
-                  <a:lnTo>
-                    <a:pt x="6231159" y="2766371"/>
-                  </a:lnTo>
-                  <a:lnTo>
-                    <a:pt x="6302782" y="2774010"/>
-                  </a:lnTo>
-                  <a:lnTo>
-                    <a:pt x="6374404" y="2781443"/>
-                  </a:lnTo>
-                  <a:lnTo>
-                    <a:pt x="6446027" y="2788676"/>
-                  </a:lnTo>
-                  <a:lnTo>
-                    <a:pt x="6517649" y="2795715"/>
-                  </a:lnTo>
-                  <a:lnTo>
-                    <a:pt x="6589272" y="2802564"/>
-                  </a:lnTo>
-                  <a:lnTo>
-                    <a:pt x="6660894" y="2809228"/>
-                  </a:lnTo>
-                  <a:lnTo>
-                    <a:pt x="6732517" y="2815713"/>
-                  </a:lnTo>
-                  <a:lnTo>
-                    <a:pt x="6804139" y="2822023"/>
-                  </a:lnTo>
-                  <a:lnTo>
-                    <a:pt x="6875762" y="2828164"/>
-                  </a:lnTo>
-                  <a:lnTo>
-                    <a:pt x="6947385" y="2834139"/>
-                  </a:lnTo>
-                  <a:lnTo>
-                    <a:pt x="7019007" y="2839953"/>
-                  </a:lnTo>
-                  <a:lnTo>
-                    <a:pt x="7090630" y="2845610"/>
+                    <a:pt x="71622" y="82751"/>
+                  </a:lnTo>
+                  <a:lnTo>
+                    <a:pt x="143245" y="163266"/>
+                  </a:lnTo>
+                  <a:lnTo>
+                    <a:pt x="214867" y="241606"/>
+                  </a:lnTo>
+                  <a:lnTo>
+                    <a:pt x="286490" y="317830"/>
+                  </a:lnTo>
+                  <a:lnTo>
+                    <a:pt x="358112" y="391994"/>
+                  </a:lnTo>
+                  <a:lnTo>
+                    <a:pt x="429735" y="464155"/>
+                  </a:lnTo>
+                  <a:lnTo>
+                    <a:pt x="501357" y="534366"/>
+                  </a:lnTo>
+                  <a:lnTo>
+                    <a:pt x="572980" y="602680"/>
+                  </a:lnTo>
+                  <a:lnTo>
+                    <a:pt x="644602" y="669148"/>
+                  </a:lnTo>
+                  <a:lnTo>
+                    <a:pt x="716225" y="733821"/>
+                  </a:lnTo>
+                  <a:lnTo>
+                    <a:pt x="787847" y="796746"/>
+                  </a:lnTo>
+                  <a:lnTo>
+                    <a:pt x="859470" y="857971"/>
+                  </a:lnTo>
+                  <a:lnTo>
+                    <a:pt x="931092" y="917542"/>
+                  </a:lnTo>
+                  <a:lnTo>
+                    <a:pt x="1002715" y="975504"/>
+                  </a:lnTo>
+                  <a:lnTo>
+                    <a:pt x="1074337" y="1031900"/>
+                  </a:lnTo>
+                  <a:lnTo>
+                    <a:pt x="1145960" y="1086772"/>
+                  </a:lnTo>
+                  <a:lnTo>
+                    <a:pt x="1217582" y="1140161"/>
+                  </a:lnTo>
+                  <a:lnTo>
+                    <a:pt x="1289205" y="1192108"/>
+                  </a:lnTo>
+                  <a:lnTo>
+                    <a:pt x="1360827" y="1242652"/>
+                  </a:lnTo>
+                  <a:lnTo>
+                    <a:pt x="1432450" y="1291830"/>
+                  </a:lnTo>
+                  <a:lnTo>
+                    <a:pt x="1504073" y="1339680"/>
+                  </a:lnTo>
+                  <a:lnTo>
+                    <a:pt x="1575695" y="1386236"/>
+                  </a:lnTo>
+                  <a:lnTo>
+                    <a:pt x="1647318" y="1431535"/>
+                  </a:lnTo>
+                  <a:lnTo>
+                    <a:pt x="1718940" y="1475610"/>
+                  </a:lnTo>
+                  <a:lnTo>
+                    <a:pt x="1790563" y="1518494"/>
+                  </a:lnTo>
+                  <a:lnTo>
+                    <a:pt x="1862185" y="1560220"/>
+                  </a:lnTo>
+                  <a:lnTo>
+                    <a:pt x="1933808" y="1600818"/>
+                  </a:lnTo>
+                  <a:lnTo>
+                    <a:pt x="2005430" y="1640320"/>
+                  </a:lnTo>
+                  <a:lnTo>
+                    <a:pt x="2077053" y="1678754"/>
+                  </a:lnTo>
+                  <a:lnTo>
+                    <a:pt x="2148675" y="1716150"/>
+                  </a:lnTo>
+                  <a:lnTo>
+                    <a:pt x="2220298" y="1752535"/>
+                  </a:lnTo>
+                  <a:lnTo>
+                    <a:pt x="2291920" y="1787938"/>
+                  </a:lnTo>
+                  <a:lnTo>
+                    <a:pt x="2363543" y="1822384"/>
+                  </a:lnTo>
+                  <a:lnTo>
+                    <a:pt x="2435165" y="1855899"/>
+                  </a:lnTo>
+                  <a:lnTo>
+                    <a:pt x="2506788" y="1888509"/>
+                  </a:lnTo>
+                  <a:lnTo>
+                    <a:pt x="2578410" y="1920238"/>
+                  </a:lnTo>
+                  <a:lnTo>
+                    <a:pt x="2650033" y="1951109"/>
+                  </a:lnTo>
+                  <a:lnTo>
+                    <a:pt x="2721655" y="1981147"/>
+                  </a:lnTo>
+                  <a:lnTo>
+                    <a:pt x="2793278" y="2010373"/>
+                  </a:lnTo>
+                  <a:lnTo>
+                    <a:pt x="2864901" y="2038809"/>
+                  </a:lnTo>
+                  <a:lnTo>
+                    <a:pt x="2936523" y="2066478"/>
+                  </a:lnTo>
+                  <a:lnTo>
+                    <a:pt x="3008146" y="2093398"/>
+                  </a:lnTo>
+                  <a:lnTo>
+                    <a:pt x="3079768" y="2119592"/>
+                  </a:lnTo>
+                  <a:lnTo>
+                    <a:pt x="3151391" y="2145077"/>
+                  </a:lnTo>
+                  <a:lnTo>
+                    <a:pt x="3223013" y="2169874"/>
+                  </a:lnTo>
+                  <a:lnTo>
+                    <a:pt x="3294636" y="2194001"/>
+                  </a:lnTo>
+                  <a:lnTo>
+                    <a:pt x="3366258" y="2217477"/>
+                  </a:lnTo>
+                  <a:lnTo>
+                    <a:pt x="3437881" y="2240318"/>
+                  </a:lnTo>
+                  <a:lnTo>
+                    <a:pt x="3509503" y="2262542"/>
+                  </a:lnTo>
+                  <a:lnTo>
+                    <a:pt x="3581126" y="2284165"/>
+                  </a:lnTo>
+                  <a:lnTo>
+                    <a:pt x="3652748" y="2305204"/>
+                  </a:lnTo>
+                  <a:lnTo>
+                    <a:pt x="3724371" y="2325675"/>
+                  </a:lnTo>
+                  <a:lnTo>
+                    <a:pt x="3795993" y="2345593"/>
+                  </a:lnTo>
+                  <a:lnTo>
+                    <a:pt x="3867616" y="2364973"/>
+                  </a:lnTo>
+                  <a:lnTo>
+                    <a:pt x="3939238" y="2383829"/>
+                  </a:lnTo>
+                  <a:lnTo>
+                    <a:pt x="4010861" y="2402176"/>
+                  </a:lnTo>
+                  <a:lnTo>
+                    <a:pt x="4082483" y="2420027"/>
+                  </a:lnTo>
+                  <a:lnTo>
+                    <a:pt x="4154106" y="2437395"/>
+                  </a:lnTo>
+                  <a:lnTo>
+                    <a:pt x="4225729" y="2454295"/>
+                  </a:lnTo>
+                  <a:lnTo>
+                    <a:pt x="4297351" y="2470738"/>
+                  </a:lnTo>
+                  <a:lnTo>
+                    <a:pt x="4368974" y="2486736"/>
+                  </a:lnTo>
+                  <a:lnTo>
+                    <a:pt x="4440596" y="2502303"/>
+                  </a:lnTo>
+                  <a:lnTo>
+                    <a:pt x="4512219" y="2517449"/>
+                  </a:lnTo>
+                  <a:lnTo>
+                    <a:pt x="4583841" y="2532185"/>
+                  </a:lnTo>
+                  <a:lnTo>
+                    <a:pt x="4655464" y="2546524"/>
+                  </a:lnTo>
+                  <a:lnTo>
+                    <a:pt x="4727086" y="2560475"/>
+                  </a:lnTo>
+                  <a:lnTo>
+                    <a:pt x="4798709" y="2574049"/>
+                  </a:lnTo>
+                  <a:lnTo>
+                    <a:pt x="4870331" y="2587256"/>
+                  </a:lnTo>
+                  <a:lnTo>
+                    <a:pt x="4941954" y="2600107"/>
+                  </a:lnTo>
+                  <a:lnTo>
+                    <a:pt x="5013576" y="2612610"/>
+                  </a:lnTo>
+                  <a:lnTo>
+                    <a:pt x="5085199" y="2624776"/>
+                  </a:lnTo>
+                  <a:lnTo>
+                    <a:pt x="5156821" y="2636613"/>
+                  </a:lnTo>
+                  <a:lnTo>
+                    <a:pt x="5228444" y="2648130"/>
+                  </a:lnTo>
+                  <a:lnTo>
+                    <a:pt x="5300066" y="2659336"/>
+                  </a:lnTo>
+                  <a:lnTo>
+                    <a:pt x="5371689" y="2670239"/>
+                  </a:lnTo>
+                  <a:lnTo>
+                    <a:pt x="5443311" y="2680848"/>
+                  </a:lnTo>
+                  <a:lnTo>
+                    <a:pt x="5514934" y="2691170"/>
+                  </a:lnTo>
+                  <a:lnTo>
+                    <a:pt x="5586557" y="2701213"/>
+                  </a:lnTo>
+                  <a:lnTo>
+                    <a:pt x="5658179" y="2710985"/>
+                  </a:lnTo>
+                  <a:lnTo>
+                    <a:pt x="5729802" y="2720493"/>
+                  </a:lnTo>
+                  <a:lnTo>
+                    <a:pt x="5801424" y="2729744"/>
+                  </a:lnTo>
+                  <a:lnTo>
+                    <a:pt x="5873047" y="2738745"/>
+                  </a:lnTo>
+                  <a:lnTo>
+                    <a:pt x="5944669" y="2747503"/>
+                  </a:lnTo>
+                  <a:lnTo>
+                    <a:pt x="6016292" y="2756024"/>
+                  </a:lnTo>
+                  <a:lnTo>
+                    <a:pt x="6087914" y="2764315"/>
+                  </a:lnTo>
+                  <a:lnTo>
+                    <a:pt x="6159537" y="2772382"/>
+                  </a:lnTo>
+                  <a:lnTo>
+                    <a:pt x="6231159" y="2780231"/>
+                  </a:lnTo>
+                  <a:lnTo>
+                    <a:pt x="6302782" y="2787868"/>
+                  </a:lnTo>
+                  <a:lnTo>
+                    <a:pt x="6374404" y="2795299"/>
+                  </a:lnTo>
+                  <a:lnTo>
+                    <a:pt x="6446027" y="2802528"/>
+                  </a:lnTo>
+                  <a:lnTo>
+                    <a:pt x="6517649" y="2809563"/>
+                  </a:lnTo>
+                  <a:lnTo>
+                    <a:pt x="6589272" y="2816408"/>
+                  </a:lnTo>
+                  <a:lnTo>
+                    <a:pt x="6660894" y="2823067"/>
+                  </a:lnTo>
+                  <a:lnTo>
+                    <a:pt x="6732517" y="2829547"/>
+                  </a:lnTo>
+                  <a:lnTo>
+                    <a:pt x="6804139" y="2835851"/>
+                  </a:lnTo>
+                  <a:lnTo>
+                    <a:pt x="6875762" y="2841986"/>
+                  </a:lnTo>
+                  <a:lnTo>
+                    <a:pt x="6947385" y="2847954"/>
+                  </a:lnTo>
+                  <a:lnTo>
+                    <a:pt x="7019007" y="2853761"/>
+                  </a:lnTo>
+                  <a:lnTo>
+                    <a:pt x="7090630" y="2859412"/>
                   </a:lnTo>
                 </a:path>
               </a:pathLst>
@@ -5087,7 +5087,7 @@
                   <a:latin typeface="Helvetica"/>
                   <a:cs typeface="Helvetica"/>
                 </a:rPr>
-                <a:t>subHR per 10 % decline: 1.39 (1.20-1.60), p = &lt;0.001  |  per IQR decline (Δ = 29.3 %): 2.61 (1.72-3.97)  |  IQR: [-14.6, 14.7] %</a:t>
+                <a:t>subHR per 10 % decline: 1.39 (1.20-1.60), p = &lt;0.001  |  per IQR decline (Δ = 29.3 %): 2.62 (1.72-3.98)  |  IQR: [-14.6, 14.7] %</a:t>
               </a:r>
             </a:p>
           </p:txBody>
